--- a/sessions_in_Abu_Dhabi/session_8.pptx
+++ b/sessions_in_Abu_Dhabi/session_8.pptx
@@ -24,6 +24,7 @@
     <p:sldId id="272" r:id="rId18"/>
     <p:sldId id="273" r:id="rId19"/>
     <p:sldId id="274" r:id="rId20"/>
+    <p:sldId id="275" r:id="rId21"/>
   </p:sldIdLst>
   <p:sldSz cx="9144000" cy="5143500" type="screen16x9"/>
   <p:notesSz cx="6858000" cy="9144000"/>
@@ -3198,6 +3199,1375 @@
       </p:grpSpPr>
       <p:sp>
         <p:nvSpPr>
+          <p:cNvPr id="3" name="Content Placeholder 2"/>
+          <p:cNvSpPr>
+            <a:spLocks noGrp="1"/>
+          </p:cNvSpPr>
+          <p:nvPr>
+            <p:ph idx="1" sz="half"/>
+          </p:nvPr>
+        </p:nvSpPr>
+        <p:spPr/>
+        <p:txBody>
+          <a:bodyPr/>
+          <a:lstStyle/>
+          <a:p>
+            <a:pPr lvl="0" indent="0">
+              <a:buNone/>
+            </a:pPr>
+            <a:r>
+              <a:rPr>
+                <a:solidFill>
+                  <a:srgbClr val="5E5E5E"/>
+                </a:solidFill>
+                <a:latin typeface="Courier"/>
+              </a:rPr>
+              <a:t># Quadratic RDD model:</a:t>
+            </a:r>
+            <a:br/>
+            <a:r>
+              <a:rPr>
+                <a:solidFill>
+                  <a:srgbClr val="5E5E5E"/>
+                </a:solidFill>
+                <a:latin typeface="Courier"/>
+              </a:rPr>
+              <a:t># Include efficiency_index_c0 and its square (efficiency_index_c0^2)</a:t>
+            </a:r>
+            <a:br/>
+            <a:r>
+              <a:rPr>
+                <a:solidFill>
+                  <a:srgbClr val="5E5E5E"/>
+                </a:solidFill>
+                <a:latin typeface="Courier"/>
+              </a:rPr>
+              <a:t># Interact them with treatment (enrolled) to allow for different slopes</a:t>
+            </a:r>
+            <a:br/>
+            <a:r>
+              <a:rPr>
+                <a:solidFill>
+                  <a:srgbClr val="5E5E5E"/>
+                </a:solidFill>
+                <a:latin typeface="Courier"/>
+              </a:rPr>
+              <a:t># and curves on each side of the cutoff</a:t>
+            </a:r>
+            <a:br/>
+            <a:r>
+              <a:rPr>
+                <a:solidFill>
+                  <a:srgbClr val="003B4F"/>
+                </a:solidFill>
+                <a:latin typeface="Courier"/>
+              </a:rPr>
+              <a:t>out_rdd_quadratic  &lt;- </a:t>
+            </a:r>
+            <a:r>
+              <a:rPr>
+                <a:solidFill>
+                  <a:srgbClr val="4758AB"/>
+                </a:solidFill>
+                <a:latin typeface="Courier"/>
+              </a:rPr>
+              <a:t>lm_robust</a:t>
+            </a:r>
+            <a:r>
+              <a:rPr>
+                <a:solidFill>
+                  <a:srgbClr val="003B4F"/>
+                </a:solidFill>
+                <a:latin typeface="Courier"/>
+              </a:rPr>
+              <a:t>(waste_management_costs </a:t>
+            </a:r>
+            <a:r>
+              <a:rPr>
+                <a:solidFill>
+                  <a:srgbClr val="5E5E5E"/>
+                </a:solidFill>
+                <a:latin typeface="Courier"/>
+              </a:rPr>
+              <a:t>~</a:t>
+            </a:r>
+            <a:r>
+              <a:rPr>
+                <a:solidFill>
+                  <a:srgbClr val="003B4F"/>
+                </a:solidFill>
+                <a:latin typeface="Courier"/>
+              </a:rPr>
+              <a:t> </a:t>
+            </a:r>
+            <a:br/>
+            <a:r>
+              <a:rPr>
+                <a:solidFill>
+                  <a:srgbClr val="003B4F"/>
+                </a:solidFill>
+                <a:latin typeface="Courier"/>
+              </a:rPr>
+              <a:t>                  efficiency_index_c0 </a:t>
+            </a:r>
+            <a:r>
+              <a:rPr>
+                <a:solidFill>
+                  <a:srgbClr val="5E5E5E"/>
+                </a:solidFill>
+                <a:latin typeface="Courier"/>
+              </a:rPr>
+              <a:t>*</a:t>
+            </a:r>
+            <a:r>
+              <a:rPr>
+                <a:solidFill>
+                  <a:srgbClr val="003B4F"/>
+                </a:solidFill>
+                <a:latin typeface="Courier"/>
+              </a:rPr>
+              <a:t> enrolled </a:t>
+            </a:r>
+            <a:r>
+              <a:rPr>
+                <a:solidFill>
+                  <a:srgbClr val="5E5E5E"/>
+                </a:solidFill>
+                <a:latin typeface="Courier"/>
+              </a:rPr>
+              <a:t>+</a:t>
+            </a:r>
+            <a:br/>
+            <a:r>
+              <a:rPr>
+                <a:solidFill>
+                  <a:srgbClr val="003B4F"/>
+                </a:solidFill>
+                <a:latin typeface="Courier"/>
+              </a:rPr>
+              <a:t>                    enrolled </a:t>
+            </a:r>
+            <a:r>
+              <a:rPr>
+                <a:solidFill>
+                  <a:srgbClr val="5E5E5E"/>
+                </a:solidFill>
+                <a:latin typeface="Courier"/>
+              </a:rPr>
+              <a:t>*</a:t>
+            </a:r>
+            <a:r>
+              <a:rPr>
+                <a:solidFill>
+                  <a:srgbClr val="003B4F"/>
+                </a:solidFill>
+                <a:latin typeface="Courier"/>
+              </a:rPr>
+              <a:t> </a:t>
+            </a:r>
+            <a:r>
+              <a:rPr>
+                <a:solidFill>
+                  <a:srgbClr val="4758AB"/>
+                </a:solidFill>
+                <a:latin typeface="Courier"/>
+              </a:rPr>
+              <a:t>I</a:t>
+            </a:r>
+            <a:r>
+              <a:rPr>
+                <a:solidFill>
+                  <a:srgbClr val="003B4F"/>
+                </a:solidFill>
+                <a:latin typeface="Courier"/>
+              </a:rPr>
+              <a:t>(efficiency_index_c0</a:t>
+            </a:r>
+            <a:r>
+              <a:rPr>
+                <a:solidFill>
+                  <a:srgbClr val="5E5E5E"/>
+                </a:solidFill>
+                <a:latin typeface="Courier"/>
+              </a:rPr>
+              <a:t>^</a:t>
+            </a:r>
+            <a:r>
+              <a:rPr>
+                <a:solidFill>
+                  <a:srgbClr val="AD0000"/>
+                </a:solidFill>
+                <a:latin typeface="Courier"/>
+              </a:rPr>
+              <a:t>2</a:t>
+            </a:r>
+            <a:r>
+              <a:rPr>
+                <a:solidFill>
+                  <a:srgbClr val="003B4F"/>
+                </a:solidFill>
+                <a:latin typeface="Courier"/>
+              </a:rPr>
+              <a:t>) </a:t>
+            </a:r>
+            <a:r>
+              <a:rPr>
+                <a:solidFill>
+                  <a:srgbClr val="5E5E5E"/>
+                </a:solidFill>
+                <a:latin typeface="Courier"/>
+              </a:rPr>
+              <a:t>+</a:t>
+            </a:r>
+            <a:br/>
+            <a:r>
+              <a:rPr>
+                <a:solidFill>
+                  <a:srgbClr val="003B4F"/>
+                </a:solidFill>
+                <a:latin typeface="Courier"/>
+              </a:rPr>
+              <a:t>                  age_manager </a:t>
+            </a:r>
+            <a:r>
+              <a:rPr>
+                <a:solidFill>
+                  <a:srgbClr val="5E5E5E"/>
+                </a:solidFill>
+                <a:latin typeface="Courier"/>
+              </a:rPr>
+              <a:t>+</a:t>
+            </a:r>
+            <a:r>
+              <a:rPr>
+                <a:solidFill>
+                  <a:srgbClr val="003B4F"/>
+                </a:solidFill>
+                <a:latin typeface="Courier"/>
+              </a:rPr>
+              <a:t> age_deputy </a:t>
+            </a:r>
+            <a:r>
+              <a:rPr>
+                <a:solidFill>
+                  <a:srgbClr val="5E5E5E"/>
+                </a:solidFill>
+                <a:latin typeface="Courier"/>
+              </a:rPr>
+              <a:t>+</a:t>
+            </a:r>
+            <a:br/>
+            <a:r>
+              <a:rPr>
+                <a:solidFill>
+                  <a:srgbClr val="003B4F"/>
+                </a:solidFill>
+                <a:latin typeface="Courier"/>
+              </a:rPr>
+              <a:t>                  female_manager </a:t>
+            </a:r>
+            <a:r>
+              <a:rPr>
+                <a:solidFill>
+                  <a:srgbClr val="5E5E5E"/>
+                </a:solidFill>
+                <a:latin typeface="Courier"/>
+              </a:rPr>
+              <a:t>+</a:t>
+            </a:r>
+            <a:r>
+              <a:rPr>
+                <a:solidFill>
+                  <a:srgbClr val="003B4F"/>
+                </a:solidFill>
+                <a:latin typeface="Courier"/>
+              </a:rPr>
+              <a:t> foreign_owned </a:t>
+            </a:r>
+            <a:r>
+              <a:rPr>
+                <a:solidFill>
+                  <a:srgbClr val="5E5E5E"/>
+                </a:solidFill>
+                <a:latin typeface="Courier"/>
+              </a:rPr>
+              <a:t>+</a:t>
+            </a:r>
+            <a:r>
+              <a:rPr>
+                <a:solidFill>
+                  <a:srgbClr val="003B4F"/>
+                </a:solidFill>
+                <a:latin typeface="Courier"/>
+              </a:rPr>
+              <a:t> </a:t>
+            </a:r>
+            <a:br/>
+            <a:r>
+              <a:rPr>
+                <a:solidFill>
+                  <a:srgbClr val="003B4F"/>
+                </a:solidFill>
+                <a:latin typeface="Courier"/>
+              </a:rPr>
+              <a:t>                  staff_size </a:t>
+            </a:r>
+            <a:r>
+              <a:rPr>
+                <a:solidFill>
+                  <a:srgbClr val="5E5E5E"/>
+                </a:solidFill>
+                <a:latin typeface="Courier"/>
+              </a:rPr>
+              <a:t>+</a:t>
+            </a:r>
+            <a:br/>
+            <a:r>
+              <a:rPr>
+                <a:solidFill>
+                  <a:srgbClr val="003B4F"/>
+                </a:solidFill>
+                <a:latin typeface="Courier"/>
+              </a:rPr>
+              <a:t>                  advanced_filtration </a:t>
+            </a:r>
+            <a:r>
+              <a:rPr>
+                <a:solidFill>
+                  <a:srgbClr val="5E5E5E"/>
+                </a:solidFill>
+                <a:latin typeface="Courier"/>
+              </a:rPr>
+              <a:t>+</a:t>
+            </a:r>
+            <a:r>
+              <a:rPr>
+                <a:solidFill>
+                  <a:srgbClr val="003B4F"/>
+                </a:solidFill>
+                <a:latin typeface="Courier"/>
+              </a:rPr>
+              <a:t> facility_area </a:t>
+            </a:r>
+            <a:r>
+              <a:rPr>
+                <a:solidFill>
+                  <a:srgbClr val="5E5E5E"/>
+                </a:solidFill>
+                <a:latin typeface="Courier"/>
+              </a:rPr>
+              <a:t>+</a:t>
+            </a:r>
+            <a:br/>
+            <a:r>
+              <a:rPr>
+                <a:solidFill>
+                  <a:srgbClr val="003B4F"/>
+                </a:solidFill>
+                <a:latin typeface="Courier"/>
+              </a:rPr>
+              <a:t>                  recycling_center_distance,</a:t>
+            </a:r>
+            <a:br/>
+            <a:r>
+              <a:rPr>
+                <a:solidFill>
+                  <a:srgbClr val="003B4F"/>
+                </a:solidFill>
+                <a:latin typeface="Courier"/>
+              </a:rPr>
+              <a:t>                  </a:t>
+            </a:r>
+            <a:r>
+              <a:rPr>
+                <a:solidFill>
+                  <a:srgbClr val="657422"/>
+                </a:solidFill>
+                <a:latin typeface="Courier"/>
+              </a:rPr>
+              <a:t>data =</a:t>
+            </a:r>
+            <a:r>
+              <a:rPr>
+                <a:solidFill>
+                  <a:srgbClr val="003B4F"/>
+                </a:solidFill>
+                <a:latin typeface="Courier"/>
+              </a:rPr>
+              <a:t> df_treat </a:t>
+            </a:r>
+            <a:r>
+              <a:rPr>
+                <a:solidFill>
+                  <a:srgbClr val="5E5E5E"/>
+                </a:solidFill>
+                <a:latin typeface="Courier"/>
+              </a:rPr>
+              <a:t>%&gt;%</a:t>
+            </a:r>
+            <a:r>
+              <a:rPr>
+                <a:solidFill>
+                  <a:srgbClr val="003B4F"/>
+                </a:solidFill>
+                <a:latin typeface="Courier"/>
+              </a:rPr>
+              <a:t> </a:t>
+            </a:r>
+            <a:r>
+              <a:rPr>
+                <a:solidFill>
+                  <a:srgbClr val="4758AB"/>
+                </a:solidFill>
+                <a:latin typeface="Courier"/>
+              </a:rPr>
+              <a:t>filter</a:t>
+            </a:r>
+            <a:r>
+              <a:rPr>
+                <a:solidFill>
+                  <a:srgbClr val="003B4F"/>
+                </a:solidFill>
+                <a:latin typeface="Courier"/>
+              </a:rPr>
+              <a:t>(round </a:t>
+            </a:r>
+            <a:r>
+              <a:rPr>
+                <a:solidFill>
+                  <a:srgbClr val="5E5E5E"/>
+                </a:solidFill>
+                <a:latin typeface="Courier"/>
+              </a:rPr>
+              <a:t>==</a:t>
+            </a:r>
+            <a:r>
+              <a:rPr>
+                <a:solidFill>
+                  <a:srgbClr val="003B4F"/>
+                </a:solidFill>
+                <a:latin typeface="Courier"/>
+              </a:rPr>
+              <a:t> </a:t>
+            </a:r>
+            <a:r>
+              <a:rPr>
+                <a:solidFill>
+                  <a:srgbClr val="AD0000"/>
+                </a:solidFill>
+                <a:latin typeface="Courier"/>
+              </a:rPr>
+              <a:t>1</a:t>
+            </a:r>
+            <a:r>
+              <a:rPr>
+                <a:solidFill>
+                  <a:srgbClr val="003B4F"/>
+                </a:solidFill>
+                <a:latin typeface="Courier"/>
+              </a:rPr>
+              <a:t>))</a:t>
+            </a:r>
+            <a:br/>
+            <a:br/>
+            <a:r>
+              <a:rPr>
+                <a:solidFill>
+                  <a:srgbClr val="5E5E5E"/>
+                </a:solidFill>
+                <a:latin typeface="Courier"/>
+              </a:rPr>
+              <a:t># Cubic RDD model:</a:t>
+            </a:r>
+            <a:br/>
+            <a:r>
+              <a:rPr>
+                <a:solidFill>
+                  <a:srgbClr val="5E5E5E"/>
+                </a:solidFill>
+                <a:latin typeface="Courier"/>
+              </a:rPr>
+              <a:t># Same as above, but also add a cubic (efficiency_index_c0^3) term</a:t>
+            </a:r>
+            <a:br/>
+            <a:r>
+              <a:rPr>
+                <a:solidFill>
+                  <a:srgbClr val="5E5E5E"/>
+                </a:solidFill>
+                <a:latin typeface="Courier"/>
+              </a:rPr>
+              <a:t># for even more flexible modeling of the relationship</a:t>
+            </a:r>
+            <a:br/>
+            <a:r>
+              <a:rPr>
+                <a:solidFill>
+                  <a:srgbClr val="003B4F"/>
+                </a:solidFill>
+                <a:latin typeface="Courier"/>
+              </a:rPr>
+              <a:t>out_rdd_cubic  &lt;- </a:t>
+            </a:r>
+            <a:r>
+              <a:rPr>
+                <a:solidFill>
+                  <a:srgbClr val="4758AB"/>
+                </a:solidFill>
+                <a:latin typeface="Courier"/>
+              </a:rPr>
+              <a:t>lm_robust</a:t>
+            </a:r>
+            <a:r>
+              <a:rPr>
+                <a:solidFill>
+                  <a:srgbClr val="003B4F"/>
+                </a:solidFill>
+                <a:latin typeface="Courier"/>
+              </a:rPr>
+              <a:t>(waste_management_costs </a:t>
+            </a:r>
+            <a:r>
+              <a:rPr>
+                <a:solidFill>
+                  <a:srgbClr val="5E5E5E"/>
+                </a:solidFill>
+                <a:latin typeface="Courier"/>
+              </a:rPr>
+              <a:t>~</a:t>
+            </a:r>
+            <a:r>
+              <a:rPr>
+                <a:solidFill>
+                  <a:srgbClr val="003B4F"/>
+                </a:solidFill>
+                <a:latin typeface="Courier"/>
+              </a:rPr>
+              <a:t> </a:t>
+            </a:r>
+            <a:br/>
+            <a:r>
+              <a:rPr>
+                <a:solidFill>
+                  <a:srgbClr val="003B4F"/>
+                </a:solidFill>
+                <a:latin typeface="Courier"/>
+              </a:rPr>
+              <a:t>                  efficiency_index_c0 </a:t>
+            </a:r>
+            <a:r>
+              <a:rPr>
+                <a:solidFill>
+                  <a:srgbClr val="5E5E5E"/>
+                </a:solidFill>
+                <a:latin typeface="Courier"/>
+              </a:rPr>
+              <a:t>*</a:t>
+            </a:r>
+            <a:r>
+              <a:rPr>
+                <a:solidFill>
+                  <a:srgbClr val="003B4F"/>
+                </a:solidFill>
+                <a:latin typeface="Courier"/>
+              </a:rPr>
+              <a:t> enrolled </a:t>
+            </a:r>
+            <a:r>
+              <a:rPr>
+                <a:solidFill>
+                  <a:srgbClr val="5E5E5E"/>
+                </a:solidFill>
+                <a:latin typeface="Courier"/>
+              </a:rPr>
+              <a:t>+</a:t>
+            </a:r>
+            <a:br/>
+            <a:r>
+              <a:rPr>
+                <a:solidFill>
+                  <a:srgbClr val="003B4F"/>
+                </a:solidFill>
+                <a:latin typeface="Courier"/>
+              </a:rPr>
+              <a:t>                    enrolled </a:t>
+            </a:r>
+            <a:r>
+              <a:rPr>
+                <a:solidFill>
+                  <a:srgbClr val="5E5E5E"/>
+                </a:solidFill>
+                <a:latin typeface="Courier"/>
+              </a:rPr>
+              <a:t>*</a:t>
+            </a:r>
+            <a:r>
+              <a:rPr>
+                <a:solidFill>
+                  <a:srgbClr val="003B4F"/>
+                </a:solidFill>
+                <a:latin typeface="Courier"/>
+              </a:rPr>
+              <a:t> </a:t>
+            </a:r>
+            <a:r>
+              <a:rPr>
+                <a:solidFill>
+                  <a:srgbClr val="4758AB"/>
+                </a:solidFill>
+                <a:latin typeface="Courier"/>
+              </a:rPr>
+              <a:t>I</a:t>
+            </a:r>
+            <a:r>
+              <a:rPr>
+                <a:solidFill>
+                  <a:srgbClr val="003B4F"/>
+                </a:solidFill>
+                <a:latin typeface="Courier"/>
+              </a:rPr>
+              <a:t>(efficiency_index_c0</a:t>
+            </a:r>
+            <a:r>
+              <a:rPr>
+                <a:solidFill>
+                  <a:srgbClr val="5E5E5E"/>
+                </a:solidFill>
+                <a:latin typeface="Courier"/>
+              </a:rPr>
+              <a:t>^</a:t>
+            </a:r>
+            <a:r>
+              <a:rPr>
+                <a:solidFill>
+                  <a:srgbClr val="AD0000"/>
+                </a:solidFill>
+                <a:latin typeface="Courier"/>
+              </a:rPr>
+              <a:t>2</a:t>
+            </a:r>
+            <a:r>
+              <a:rPr>
+                <a:solidFill>
+                  <a:srgbClr val="003B4F"/>
+                </a:solidFill>
+                <a:latin typeface="Courier"/>
+              </a:rPr>
+              <a:t>) </a:t>
+            </a:r>
+            <a:r>
+              <a:rPr>
+                <a:solidFill>
+                  <a:srgbClr val="5E5E5E"/>
+                </a:solidFill>
+                <a:latin typeface="Courier"/>
+              </a:rPr>
+              <a:t>+</a:t>
+            </a:r>
+            <a:r>
+              <a:rPr>
+                <a:solidFill>
+                  <a:srgbClr val="003B4F"/>
+                </a:solidFill>
+                <a:latin typeface="Courier"/>
+              </a:rPr>
+              <a:t> </a:t>
+            </a:r>
+            <a:br/>
+            <a:r>
+              <a:rPr>
+                <a:solidFill>
+                  <a:srgbClr val="003B4F"/>
+                </a:solidFill>
+                <a:latin typeface="Courier"/>
+              </a:rPr>
+              <a:t>                        enrolled </a:t>
+            </a:r>
+            <a:r>
+              <a:rPr>
+                <a:solidFill>
+                  <a:srgbClr val="5E5E5E"/>
+                </a:solidFill>
+                <a:latin typeface="Courier"/>
+              </a:rPr>
+              <a:t>*</a:t>
+            </a:r>
+            <a:r>
+              <a:rPr>
+                <a:solidFill>
+                  <a:srgbClr val="003B4F"/>
+                </a:solidFill>
+                <a:latin typeface="Courier"/>
+              </a:rPr>
+              <a:t> </a:t>
+            </a:r>
+            <a:r>
+              <a:rPr>
+                <a:solidFill>
+                  <a:srgbClr val="4758AB"/>
+                </a:solidFill>
+                <a:latin typeface="Courier"/>
+              </a:rPr>
+              <a:t>I</a:t>
+            </a:r>
+            <a:r>
+              <a:rPr>
+                <a:solidFill>
+                  <a:srgbClr val="003B4F"/>
+                </a:solidFill>
+                <a:latin typeface="Courier"/>
+              </a:rPr>
+              <a:t>(efficiency_index_c0</a:t>
+            </a:r>
+            <a:r>
+              <a:rPr>
+                <a:solidFill>
+                  <a:srgbClr val="5E5E5E"/>
+                </a:solidFill>
+                <a:latin typeface="Courier"/>
+              </a:rPr>
+              <a:t>^</a:t>
+            </a:r>
+            <a:r>
+              <a:rPr>
+                <a:solidFill>
+                  <a:srgbClr val="AD0000"/>
+                </a:solidFill>
+                <a:latin typeface="Courier"/>
+              </a:rPr>
+              <a:t>3</a:t>
+            </a:r>
+            <a:r>
+              <a:rPr>
+                <a:solidFill>
+                  <a:srgbClr val="003B4F"/>
+                </a:solidFill>
+                <a:latin typeface="Courier"/>
+              </a:rPr>
+              <a:t>) </a:t>
+            </a:r>
+            <a:r>
+              <a:rPr>
+                <a:solidFill>
+                  <a:srgbClr val="5E5E5E"/>
+                </a:solidFill>
+                <a:latin typeface="Courier"/>
+              </a:rPr>
+              <a:t>+</a:t>
+            </a:r>
+            <a:br/>
+            <a:r>
+              <a:rPr>
+                <a:solidFill>
+                  <a:srgbClr val="003B4F"/>
+                </a:solidFill>
+                <a:latin typeface="Courier"/>
+              </a:rPr>
+              <a:t>                  age_manager </a:t>
+            </a:r>
+            <a:r>
+              <a:rPr>
+                <a:solidFill>
+                  <a:srgbClr val="5E5E5E"/>
+                </a:solidFill>
+                <a:latin typeface="Courier"/>
+              </a:rPr>
+              <a:t>+</a:t>
+            </a:r>
+            <a:r>
+              <a:rPr>
+                <a:solidFill>
+                  <a:srgbClr val="003B4F"/>
+                </a:solidFill>
+                <a:latin typeface="Courier"/>
+              </a:rPr>
+              <a:t> age_deputy </a:t>
+            </a:r>
+            <a:r>
+              <a:rPr>
+                <a:solidFill>
+                  <a:srgbClr val="5E5E5E"/>
+                </a:solidFill>
+                <a:latin typeface="Courier"/>
+              </a:rPr>
+              <a:t>+</a:t>
+            </a:r>
+            <a:br/>
+            <a:r>
+              <a:rPr>
+                <a:solidFill>
+                  <a:srgbClr val="003B4F"/>
+                </a:solidFill>
+                <a:latin typeface="Courier"/>
+              </a:rPr>
+              <a:t>                  female_manager </a:t>
+            </a:r>
+            <a:r>
+              <a:rPr>
+                <a:solidFill>
+                  <a:srgbClr val="5E5E5E"/>
+                </a:solidFill>
+                <a:latin typeface="Courier"/>
+              </a:rPr>
+              <a:t>+</a:t>
+            </a:r>
+            <a:r>
+              <a:rPr>
+                <a:solidFill>
+                  <a:srgbClr val="003B4F"/>
+                </a:solidFill>
+                <a:latin typeface="Courier"/>
+              </a:rPr>
+              <a:t> foreign_owned </a:t>
+            </a:r>
+            <a:r>
+              <a:rPr>
+                <a:solidFill>
+                  <a:srgbClr val="5E5E5E"/>
+                </a:solidFill>
+                <a:latin typeface="Courier"/>
+              </a:rPr>
+              <a:t>+</a:t>
+            </a:r>
+            <a:r>
+              <a:rPr>
+                <a:solidFill>
+                  <a:srgbClr val="003B4F"/>
+                </a:solidFill>
+                <a:latin typeface="Courier"/>
+              </a:rPr>
+              <a:t> </a:t>
+            </a:r>
+            <a:br/>
+            <a:r>
+              <a:rPr>
+                <a:solidFill>
+                  <a:srgbClr val="003B4F"/>
+                </a:solidFill>
+                <a:latin typeface="Courier"/>
+              </a:rPr>
+              <a:t>                  staff_size </a:t>
+            </a:r>
+            <a:r>
+              <a:rPr>
+                <a:solidFill>
+                  <a:srgbClr val="5E5E5E"/>
+                </a:solidFill>
+                <a:latin typeface="Courier"/>
+              </a:rPr>
+              <a:t>+</a:t>
+            </a:r>
+            <a:br/>
+            <a:r>
+              <a:rPr>
+                <a:solidFill>
+                  <a:srgbClr val="003B4F"/>
+                </a:solidFill>
+                <a:latin typeface="Courier"/>
+              </a:rPr>
+              <a:t>                  advanced_filtration </a:t>
+            </a:r>
+            <a:r>
+              <a:rPr>
+                <a:solidFill>
+                  <a:srgbClr val="5E5E5E"/>
+                </a:solidFill>
+                <a:latin typeface="Courier"/>
+              </a:rPr>
+              <a:t>+</a:t>
+            </a:r>
+            <a:r>
+              <a:rPr>
+                <a:solidFill>
+                  <a:srgbClr val="003B4F"/>
+                </a:solidFill>
+                <a:latin typeface="Courier"/>
+              </a:rPr>
+              <a:t> facility_area </a:t>
+            </a:r>
+            <a:r>
+              <a:rPr>
+                <a:solidFill>
+                  <a:srgbClr val="5E5E5E"/>
+                </a:solidFill>
+                <a:latin typeface="Courier"/>
+              </a:rPr>
+              <a:t>+</a:t>
+            </a:r>
+            <a:br/>
+            <a:r>
+              <a:rPr>
+                <a:solidFill>
+                  <a:srgbClr val="003B4F"/>
+                </a:solidFill>
+                <a:latin typeface="Courier"/>
+              </a:rPr>
+              <a:t>                  recycling_center_distance,</a:t>
+            </a:r>
+            <a:br/>
+            <a:r>
+              <a:rPr>
+                <a:solidFill>
+                  <a:srgbClr val="003B4F"/>
+                </a:solidFill>
+                <a:latin typeface="Courier"/>
+              </a:rPr>
+              <a:t>                  </a:t>
+            </a:r>
+            <a:r>
+              <a:rPr>
+                <a:solidFill>
+                  <a:srgbClr val="657422"/>
+                </a:solidFill>
+                <a:latin typeface="Courier"/>
+              </a:rPr>
+              <a:t>data =</a:t>
+            </a:r>
+            <a:r>
+              <a:rPr>
+                <a:solidFill>
+                  <a:srgbClr val="003B4F"/>
+                </a:solidFill>
+                <a:latin typeface="Courier"/>
+              </a:rPr>
+              <a:t> df_treat </a:t>
+            </a:r>
+            <a:r>
+              <a:rPr>
+                <a:solidFill>
+                  <a:srgbClr val="5E5E5E"/>
+                </a:solidFill>
+                <a:latin typeface="Courier"/>
+              </a:rPr>
+              <a:t>%&gt;%</a:t>
+            </a:r>
+            <a:r>
+              <a:rPr>
+                <a:solidFill>
+                  <a:srgbClr val="003B4F"/>
+                </a:solidFill>
+                <a:latin typeface="Courier"/>
+              </a:rPr>
+              <a:t> </a:t>
+            </a:r>
+            <a:r>
+              <a:rPr>
+                <a:solidFill>
+                  <a:srgbClr val="4758AB"/>
+                </a:solidFill>
+                <a:latin typeface="Courier"/>
+              </a:rPr>
+              <a:t>filter</a:t>
+            </a:r>
+            <a:r>
+              <a:rPr>
+                <a:solidFill>
+                  <a:srgbClr val="003B4F"/>
+                </a:solidFill>
+                <a:latin typeface="Courier"/>
+              </a:rPr>
+              <a:t>(round </a:t>
+            </a:r>
+            <a:r>
+              <a:rPr>
+                <a:solidFill>
+                  <a:srgbClr val="5E5E5E"/>
+                </a:solidFill>
+                <a:latin typeface="Courier"/>
+              </a:rPr>
+              <a:t>==</a:t>
+            </a:r>
+            <a:r>
+              <a:rPr>
+                <a:solidFill>
+                  <a:srgbClr val="003B4F"/>
+                </a:solidFill>
+                <a:latin typeface="Courier"/>
+              </a:rPr>
+              <a:t> </a:t>
+            </a:r>
+            <a:r>
+              <a:rPr>
+                <a:solidFill>
+                  <a:srgbClr val="AD0000"/>
+                </a:solidFill>
+                <a:latin typeface="Courier"/>
+              </a:rPr>
+              <a:t>1</a:t>
+            </a:r>
+            <a:r>
+              <a:rPr>
+                <a:solidFill>
+                  <a:srgbClr val="003B4F"/>
+                </a:solidFill>
+                <a:latin typeface="Courier"/>
+              </a:rPr>
+              <a:t>))</a:t>
+            </a:r>
+          </a:p>
+        </p:txBody>
+      </p:sp>
+      <p:graphicFrame>
+        <p:nvGraphicFramePr>
+          <p:cNvPr id="6" name="Content Placeholder 5"/>
+          <p:cNvGraphicFramePr>
+            <a:graphicFrameLocks noGrp="1"/>
+          </p:cNvGraphicFramePr>
+          <p:nvPr>
+            <p:ph idx="1"/>
+          </p:nvPr>
+        </p:nvGraphicFramePr>
+        <p:xfrm>
+          <a:off x="4648200" y="1193800"/>
+          <a:ext cx="4038600" cy="3390900"/>
+        </p:xfrm>
+        <a:graphic>
+          <a:graphicData uri="http://schemas.openxmlformats.org/drawingml/2006/table">
+            <a:tbl>
+              <a:tblPr firstRow="1" bandRow="1">
+                <a:tableStyleId>{5C22544A-7EE6-4342-B048-85BDC9FD1C3A}</a:tableStyleId>
+              </a:tblPr>
+              <a:tblGrid>
+                <a:gridCol w="1346200"/>
+                <a:gridCol w="1346200"/>
+                <a:gridCol w="1346200"/>
+              </a:tblGrid>
+              <a:tr h="0">
+                <a:tc>
+                  <a:txBody>
+                    <a:bodyPr/>
+                    <a:lstStyle/>
+                    <a:p>
+                      <a:endParaRPr/>
+                    </a:p>
+                  </a:txBody>
+                  <a:tcPr/>
+                </a:tc>
+                <a:tc>
+                  <a:txBody>
+                    <a:bodyPr/>
+                    <a:lstStyle/>
+                    <a:p>
+                      <a:pPr lvl="0" indent="0" marL="0" algn="ctr">
+                        <a:buNone/>
+                      </a:pPr>
+                      <a:r>
+                        <a:rPr/>
+                        <a:t>Quadratic RDD</a:t>
+                      </a:r>
+                    </a:p>
+                  </a:txBody>
+                  <a:tcPr/>
+                </a:tc>
+                <a:tc>
+                  <a:txBody>
+                    <a:bodyPr/>
+                    <a:lstStyle/>
+                    <a:p>
+                      <a:pPr lvl="0" indent="0" marL="0" algn="ctr">
+                        <a:buNone/>
+                      </a:pPr>
+                      <a:r>
+                        <a:rPr/>
+                        <a:t>Cubic RDD</a:t>
+                      </a:r>
+                    </a:p>
+                  </a:txBody>
+                  <a:tcPr/>
+                </a:tc>
+              </a:tr>
+              <a:tr h="0">
+                <a:tc>
+                  <a:txBody>
+                    <a:bodyPr/>
+                    <a:lstStyle/>
+                    <a:p>
+                      <a:pPr lvl="0" indent="0" marL="0" algn="l">
+                        <a:buNone/>
+                      </a:pPr>
+                      <a:r>
+                        <a:rPr/>
+                        <a:t>enrolled</a:t>
+                      </a:r>
+                    </a:p>
+                  </a:txBody>
+                </a:tc>
+                <a:tc>
+                  <a:txBody>
+                    <a:bodyPr/>
+                    <a:lstStyle/>
+                    <a:p>
+                      <a:pPr lvl="0" indent="0" marL="0" algn="ctr">
+                        <a:buNone/>
+                      </a:pPr>
+                      <a:r>
+                        <a:rPr/>
+                        <a:t>−945.768***</a:t>
+                      </a:r>
+                    </a:p>
+                  </a:txBody>
+                </a:tc>
+                <a:tc>
+                  <a:txBody>
+                    <a:bodyPr/>
+                    <a:lstStyle/>
+                    <a:p>
+                      <a:pPr lvl="0" indent="0" marL="0" algn="ctr">
+                        <a:buNone/>
+                      </a:pPr>
+                      <a:r>
+                        <a:rPr/>
+                        <a:t>−893.428***</a:t>
+                      </a:r>
+                    </a:p>
+                  </a:txBody>
+                </a:tc>
+              </a:tr>
+              <a:tr h="0">
+                <a:tc>
+                  <a:txBody>
+                    <a:bodyPr/>
+                    <a:lstStyle/>
+                    <a:p>
+                      <a:endParaRPr/>
+                    </a:p>
+                  </a:txBody>
+                </a:tc>
+                <a:tc>
+                  <a:txBody>
+                    <a:bodyPr/>
+                    <a:lstStyle/>
+                    <a:p>
+                      <a:pPr lvl="0" indent="0" marL="0" algn="ctr">
+                        <a:buNone/>
+                      </a:pPr>
+                      <a:r>
+                        <a:rPr/>
+                        <a:t>(60.990)</a:t>
+                      </a:r>
+                    </a:p>
+                  </a:txBody>
+                </a:tc>
+                <a:tc>
+                  <a:txBody>
+                    <a:bodyPr/>
+                    <a:lstStyle/>
+                    <a:p>
+                      <a:pPr lvl="0" indent="0" marL="0" algn="ctr">
+                        <a:buNone/>
+                      </a:pPr>
+                      <a:r>
+                        <a:rPr/>
+                        <a:t>(75.703)</a:t>
+                      </a:r>
+                    </a:p>
+                  </a:txBody>
+                </a:tc>
+              </a:tr>
+              <a:tr h="0">
+                <a:tc>
+                  <a:txBody>
+                    <a:bodyPr/>
+                    <a:lstStyle/>
+                    <a:p>
+                      <a:pPr lvl="0" indent="0" marL="0" algn="l">
+                        <a:buNone/>
+                      </a:pPr>
+                      <a:r>
+                        <a:rPr/>
+                        <a:t>Num.Obs.</a:t>
+                      </a:r>
+                    </a:p>
+                  </a:txBody>
+                </a:tc>
+                <a:tc>
+                  <a:txBody>
+                    <a:bodyPr/>
+                    <a:lstStyle/>
+                    <a:p>
+                      <a:pPr lvl="0" indent="0" marL="0" algn="ctr">
+                        <a:buNone/>
+                      </a:pPr>
+                      <a:r>
+                        <a:rPr/>
+                        <a:t>4960</a:t>
+                      </a:r>
+                    </a:p>
+                  </a:txBody>
+                </a:tc>
+                <a:tc>
+                  <a:txBody>
+                    <a:bodyPr/>
+                    <a:lstStyle/>
+                    <a:p>
+                      <a:pPr lvl="0" indent="0" marL="0" algn="ctr">
+                        <a:buNone/>
+                      </a:pPr>
+                      <a:r>
+                        <a:rPr/>
+                        <a:t>4960</a:t>
+                      </a:r>
+                    </a:p>
+                  </a:txBody>
+                </a:tc>
+              </a:tr>
+              <a:tr h="0">
+                <a:tc>
+                  <a:txBody>
+                    <a:bodyPr/>
+                    <a:lstStyle/>
+                    <a:p>
+                      <a:pPr lvl="0" indent="0" marL="0" algn="l">
+                        <a:buNone/>
+                      </a:pPr>
+                      <a:r>
+                        <a:rPr/>
+                        <a:t>R2</a:t>
+                      </a:r>
+                    </a:p>
+                  </a:txBody>
+                </a:tc>
+                <a:tc>
+                  <a:txBody>
+                    <a:bodyPr/>
+                    <a:lstStyle/>
+                    <a:p>
+                      <a:pPr lvl="0" indent="0" marL="0" algn="ctr">
+                        <a:buNone/>
+                      </a:pPr>
+                      <a:r>
+                        <a:rPr/>
+                        <a:t>0.457</a:t>
+                      </a:r>
+                    </a:p>
+                  </a:txBody>
+                </a:tc>
+                <a:tc>
+                  <a:txBody>
+                    <a:bodyPr/>
+                    <a:lstStyle/>
+                    <a:p>
+                      <a:pPr lvl="0" indent="0" marL="0" algn="ctr">
+                        <a:buNone/>
+                      </a:pPr>
+                      <a:r>
+                        <a:rPr/>
+                        <a:t>0.457</a:t>
+                      </a:r>
+                    </a:p>
+                  </a:txBody>
+                </a:tc>
+              </a:tr>
+              <a:tr h="0">
+                <a:tc>
+                  <a:txBody>
+                    <a:bodyPr/>
+                    <a:lstStyle/>
+                    <a:p>
+                      <a:pPr lvl="0" indent="0" marL="0" algn="l">
+                        <a:buNone/>
+                      </a:pPr>
+                      <a:r>
+                        <a:rPr/>
+                        <a:t>R2 Adj.</a:t>
+                      </a:r>
+                    </a:p>
+                  </a:txBody>
+                </a:tc>
+                <a:tc>
+                  <a:txBody>
+                    <a:bodyPr/>
+                    <a:lstStyle/>
+                    <a:p>
+                      <a:pPr lvl="0" indent="0" marL="0" algn="ctr">
+                        <a:buNone/>
+                      </a:pPr>
+                      <a:r>
+                        <a:rPr/>
+                        <a:t>0.456</a:t>
+                      </a:r>
+                    </a:p>
+                  </a:txBody>
+                </a:tc>
+                <a:tc>
+                  <a:txBody>
+                    <a:bodyPr/>
+                    <a:lstStyle/>
+                    <a:p>
+                      <a:pPr lvl="0" indent="0" marL="0" algn="ctr">
+                        <a:buNone/>
+                      </a:pPr>
+                      <a:r>
+                        <a:rPr/>
+                        <a:t>0.456</a:t>
+                      </a:r>
+                    </a:p>
+                  </a:txBody>
+                </a:tc>
+              </a:tr>
+              <a:tr h="0">
+                <a:tc>
+                  <a:txBody>
+                    <a:bodyPr/>
+                    <a:lstStyle/>
+                    <a:p>
+                      <a:pPr lvl="0" indent="0" marL="0" algn="l">
+                        <a:buNone/>
+                      </a:pPr>
+                      <a:r>
+                        <a:rPr/>
+                        <a:t> + p &lt; 0.1, * p &lt; 0.05, ** p &lt; 0.01, *** p &lt; 0.001</a:t>
+                      </a:r>
+                    </a:p>
+                  </a:txBody>
+                </a:tc>
+                <a:tc>
+                  <a:txBody>
+                    <a:bodyPr/>
+                    <a:lstStyle/>
+                    <a:p>
+                      <a:endParaRPr/>
+                    </a:p>
+                  </a:txBody>
+                </a:tc>
+                <a:tc>
+                  <a:txBody>
+                    <a:bodyPr/>
+                    <a:lstStyle/>
+                    <a:p>
+                      <a:endParaRPr/>
+                    </a:p>
+                  </a:txBody>
+                </a:tc>
+              </a:tr>
+            </a:tbl>
+          </a:graphicData>
+        </a:graphic>
+      </p:graphicFrame>
+    </p:spTree>
+  </p:cSld>
+</p:sld>
+</file>
+
+<file path=ppt/slides/slide11.xml><?xml version="1.0" encoding="utf-8"?>
+<p:sld xmlns:a="http://schemas.openxmlformats.org/drawingml/2006/main" xmlns:r="http://schemas.openxmlformats.org/officeDocument/2006/relationships" xmlns:p="http://schemas.openxmlformats.org/presentationml/2006/main">
+  <p:cSld>
+    <p:spTree>
+      <p:nvGrpSpPr>
+        <p:cNvPr id="1" name=""/>
+        <p:cNvGrpSpPr/>
+        <p:nvPr/>
+      </p:nvGrpSpPr>
+      <p:grpSpPr>
+        <a:xfrm>
+          <a:off x="0" y="0"/>
+          <a:ext cx="0" cy="0"/>
+          <a:chOff x="0" y="0"/>
+          <a:chExt cx="0" cy="0"/>
+        </a:xfrm>
+      </p:grpSpPr>
+      <p:sp>
+        <p:nvSpPr>
           <p:cNvPr id="2" name="Title 1"/>
           <p:cNvSpPr>
             <a:spLocks noGrp="1"/>
@@ -3739,7 +5109,7 @@
                       </a:pPr>
                       <a:r>
                         <a:rPr/>
-                        <a:t> (1)</a:t>
+                        <a:t>Restricted RDD</a:t>
                       </a:r>
                     </a:p>
                   </a:txBody>
@@ -3772,7 +5142,7 @@
                       </a:pPr>
                       <a:r>
                         <a:rPr/>
-                        <a:t>−9051.372***</a:t>
+                        <a:t>−905.137***</a:t>
                       </a:r>
                     </a:p>
                   </a:txBody>
@@ -3798,7 +5168,7 @@
                       </a:pPr>
                       <a:r>
                         <a:rPr/>
-                        <a:t>(443.750)</a:t>
+                        <a:t>(44.375)</a:t>
                       </a:r>
                     </a:p>
                   </a:txBody>
@@ -4105,7 +5475,7 @@
 </p:sld>
 </file>
 
-<file path=ppt/slides/slide11.xml><?xml version="1.0" encoding="utf-8"?>
+<file path=ppt/slides/slide12.xml><?xml version="1.0" encoding="utf-8"?>
 <p:sld xmlns:a="http://schemas.openxmlformats.org/drawingml/2006/main" xmlns:r="http://schemas.openxmlformats.org/officeDocument/2006/relationships" xmlns:p="http://schemas.openxmlformats.org/presentationml/2006/main">
   <p:cSld>
     <p:spTree>
@@ -4208,7 +5578,7 @@
       </p:sp>
       <p:pic>
         <p:nvPicPr>
-          <p:cNvPr descr="session_8_files/figure-pptx/unnamed-chunk-12-1.png" id="0" name="Picture 1"/>
+          <p:cNvPr descr="session_8_files/figure-pptx/unnamed-chunk-13-1.png" id="0" name="Picture 1"/>
           <p:cNvPicPr>
             <a:picLocks noGrp="1" noChangeAspect="1"/>
           </p:cNvPicPr>
@@ -4519,7 +5889,7 @@
 </p:sld>
 </file>
 
-<file path=ppt/slides/slide12.xml><?xml version="1.0" encoding="utf-8"?>
+<file path=ppt/slides/slide13.xml><?xml version="1.0" encoding="utf-8"?>
 <p:sld xmlns:a="http://schemas.openxmlformats.org/drawingml/2006/main" xmlns:r="http://schemas.openxmlformats.org/officeDocument/2006/relationships" xmlns:p="http://schemas.openxmlformats.org/presentationml/2006/main">
   <p:cSld>
     <p:spTree>
@@ -4592,7 +5962,7 @@
             <a:pPr lvl="0"/>
             <a:r>
               <a:rPr/>
-              <a:t>Effect: -$9.03</a:t>
+              <a:t>Effect: -905 AED</a:t>
             </a:r>
           </a:p>
           <a:p>
@@ -4662,7 +6032,7 @@
             <a:pPr lvl="0"/>
             <a:r>
               <a:rPr/>
-              <a:t>Effect: -$9.74</a:t>
+              <a:t>Effect: -1,033 AED</a:t>
             </a:r>
           </a:p>
           <a:p>
@@ -4696,7 +6066,7 @@
             </a:r>
             <a:r>
               <a:rPr/>
-              <a:t>: Do not scale up</a:t>
+              <a:t>: Scale up nationally</a:t>
             </a:r>
           </a:p>
         </p:txBody>
@@ -5132,7 +6502,7 @@
 </p:sld>
 </file>
 
-<file path=ppt/slides/slide13.xml><?xml version="1.0" encoding="utf-8"?>
+<file path=ppt/slides/slide14.xml><?xml version="1.0" encoding="utf-8"?>
 <p:sld xmlns:a="http://schemas.openxmlformats.org/drawingml/2006/main" xmlns:r="http://schemas.openxmlformats.org/officeDocument/2006/relationships" xmlns:p="http://schemas.openxmlformats.org/presentationml/2006/main">
   <p:cSld>
     <p:spTree>
@@ -5380,7 +6750,7 @@
 </p:sld>
 </file>
 
-<file path=ppt/slides/slide14.xml><?xml version="1.0" encoding="utf-8"?>
+<file path=ppt/slides/slide15.xml><?xml version="1.0" encoding="utf-8"?>
 <p:sld xmlns:a="http://schemas.openxmlformats.org/drawingml/2006/main" xmlns:r="http://schemas.openxmlformats.org/officeDocument/2006/relationships" xmlns:p="http://schemas.openxmlformats.org/presentationml/2006/main">
   <p:cSld>
     <p:spTree>
@@ -5468,6 +6838,13 @@
             <a:r>
               <a:rPr/>
               <a:t>Units cannot precisely manipulate their position around threshold</a:t>
+            </a:r>
+          </a:p>
+          <a:p>
+            <a:pPr lvl="0"/>
+            <a:r>
+              <a:rPr/>
+              <a:t>We have sufficient participants/units within the bandwidth that we set</a:t>
             </a:r>
           </a:p>
           <a:p>
@@ -5754,7 +7131,7 @@
                                         <p:tgtEl>
                                           <p:spTgt spid="3">
                                             <p:txEl>
-                                              <p:pRg st="6" end="6"/>
+                                              <p:pRg st="5" end="5"/>
                                             </p:txEl>
                                           </p:spTgt>
                                         </p:tgtEl>
@@ -5922,6 +7299,55 @@
                       </p:childTnLst>
                     </p:cTn>
                   </p:par>
+                  <p:par>
+                    <p:cTn id="35" fill="hold">
+                      <p:stCondLst>
+                        <p:cond delay="indefinite"/>
+                      </p:stCondLst>
+                      <p:childTnLst>
+                        <p:par>
+                          <p:cTn id="36" fill="hold">
+                            <p:stCondLst>
+                              <p:cond delay="0"/>
+                            </p:stCondLst>
+                            <p:childTnLst>
+                              <p:par>
+                                <p:cTn id="37" presetID="1" presetClass="entr" presetSubtype="0" fill="hold" grpId="0" nodeType="clickEffect">
+                                  <p:stCondLst>
+                                    <p:cond delay="0"/>
+                                  </p:stCondLst>
+                                  <p:childTnLst>
+                                    <p:set>
+                                      <p:cBhvr>
+                                        <p:cTn id="38" dur="1" fill="hold">
+                                          <p:stCondLst>
+                                            <p:cond delay="0"/>
+                                          </p:stCondLst>
+                                        </p:cTn>
+                                        <p:tgtEl>
+                                          <p:spTgt spid="3">
+                                            <p:txEl>
+                                              <p:pRg st="10" end="10"/>
+                                            </p:txEl>
+                                          </p:spTgt>
+                                        </p:tgtEl>
+                                        <p:attrNameLst>
+                                          <p:attrName>style.visibility</p:attrName>
+                                        </p:attrNameLst>
+                                      </p:cBhvr>
+                                      <p:to>
+                                        <p:strVal val="visible"/>
+                                      </p:to>
+                                    </p:set>
+                                  </p:childTnLst>
+                                </p:cTn>
+                              </p:par>
+                            </p:childTnLst>
+                          </p:cTn>
+                        </p:par>
+                      </p:childTnLst>
+                    </p:cTn>
+                  </p:par>
                 </p:childTnLst>
               </p:cTn>
               <p:prevCondLst>
@@ -5950,7 +7376,7 @@
 </p:sld>
 </file>
 
-<file path=ppt/slides/slide15.xml><?xml version="1.0" encoding="utf-8"?>
+<file path=ppt/slides/slide16.xml><?xml version="1.0" encoding="utf-8"?>
 <p:sld xmlns:a="http://schemas.openxmlformats.org/drawingml/2006/main" xmlns:r="http://schemas.openxmlformats.org/officeDocument/2006/relationships" xmlns:p="http://schemas.openxmlformats.org/presentationml/2006/main">
   <p:cSld>
     <p:spTree>
@@ -6562,7 +7988,7 @@
 </p:sld>
 </file>
 
-<file path=ppt/slides/slide16.xml><?xml version="1.0" encoding="utf-8"?>
+<file path=ppt/slides/slide17.xml><?xml version="1.0" encoding="utf-8"?>
 <p:sld xmlns:a="http://schemas.openxmlformats.org/drawingml/2006/main" xmlns:r="http://schemas.openxmlformats.org/officeDocument/2006/relationships" xmlns:p="http://schemas.openxmlformats.org/presentationml/2006/main">
   <p:cSld>
     <p:spTree>
@@ -7394,7 +8820,7 @@
 </p:sld>
 </file>
 
-<file path=ppt/slides/slide17.xml><?xml version="1.0" encoding="utf-8"?>
+<file path=ppt/slides/slide18.xml><?xml version="1.0" encoding="utf-8"?>
 <p:sld xmlns:a="http://schemas.openxmlformats.org/drawingml/2006/main" xmlns:r="http://schemas.openxmlformats.org/officeDocument/2006/relationships" xmlns:p="http://schemas.openxmlformats.org/presentationml/2006/main">
   <p:cSld>
     <p:spTree>
@@ -7473,7 +8899,7 @@
             </a:r>
             <a:r>
               <a:rPr/>
-              <a:t>: Program must reduce health expenditures by at least $10,000.</a:t>
+              <a:t>: Program must reduce waste expenditures by at least 1,000 AED.</a:t>
             </a:r>
           </a:p>
           <a:p>
@@ -7493,14 +8919,14 @@
             <a:pPr lvl="0"/>
             <a:r>
               <a:rPr/>
-              <a:t>Effect: $-9051 (95% CI: [ $-8182, $-9921])</a:t>
+              <a:t>Effect: -905 AED (95% CI: [-818, -992])</a:t>
             </a:r>
           </a:p>
           <a:p>
             <a:pPr lvl="0"/>
             <a:r>
               <a:rPr/>
-              <a:t>Point estimate below the $10,000 threshold</a:t>
+              <a:t>Point estimate below the 1,000 AED threshold</a:t>
             </a:r>
           </a:p>
           <a:p>
@@ -7520,7 +8946,7 @@
             </a:r>
             <a:r>
               <a:rPr/>
-              <a:t>: Based on the RDD estimate, the Program should not be scaled up nationally.</a:t>
+              <a:t>: Based on the RDD estimate, the program should not be scaled up nationally.</a:t>
             </a:r>
           </a:p>
         </p:txBody>
@@ -7710,7 +9136,7 @@
 </p:sld>
 </file>
 
-<file path=ppt/slides/slide18.xml><?xml version="1.0" encoding="utf-8"?>
+<file path=ppt/slides/slide19.xml><?xml version="1.0" encoding="utf-8"?>
 <p:sld xmlns:a="http://schemas.openxmlformats.org/drawingml/2006/main" xmlns:r="http://schemas.openxmlformats.org/officeDocument/2006/relationships" xmlns:p="http://schemas.openxmlformats.org/presentationml/2006/main">
   <p:cSld>
     <p:spTree>
@@ -7799,7 +9225,7 @@
             </a:pPr>
             <a:r>
               <a:rPr/>
-              <a:t>Multiple specifications yield consistent estimates of approximately $90,00 reduction</a:t>
+              <a:t>Multiple specifications yield consistent estimates of approximately 905 AED reduction</a:t>
             </a:r>
           </a:p>
           <a:p>
@@ -7808,7 +9234,7 @@
             </a:pPr>
             <a:r>
               <a:rPr/>
-              <a:t>RDD estimate is slightly below the $10,000 threshold for scaling up HISP</a:t>
+              <a:t>RDD estimate is slightly below the 1,000 AED threshold for scaling up GreenWaste</a:t>
             </a:r>
           </a:p>
         </p:txBody>
@@ -8096,82 +9522,6 @@
 </p:sld>
 </file>
 
-<file path=ppt/slides/slide19.xml><?xml version="1.0" encoding="utf-8"?>
-<p:sld xmlns:a="http://schemas.openxmlformats.org/drawingml/2006/main" xmlns:r="http://schemas.openxmlformats.org/officeDocument/2006/relationships" xmlns:p="http://schemas.openxmlformats.org/presentationml/2006/main">
-  <p:cSld>
-    <p:spTree>
-      <p:nvGrpSpPr>
-        <p:cNvPr id="1" name=""/>
-        <p:cNvGrpSpPr/>
-        <p:nvPr/>
-      </p:nvGrpSpPr>
-      <p:grpSpPr>
-        <a:xfrm>
-          <a:off x="0" y="0"/>
-          <a:ext cx="0" cy="0"/>
-          <a:chOff x="0" y="0"/>
-          <a:chExt cx="0" cy="0"/>
-        </a:xfrm>
-      </p:grpSpPr>
-      <p:sp>
-        <p:nvSpPr>
-          <p:cNvPr id="2" name="Title 1"/>
-          <p:cNvSpPr>
-            <a:spLocks noGrp="1"/>
-          </p:cNvSpPr>
-          <p:nvPr>
-            <p:ph type="title"/>
-          </p:nvPr>
-        </p:nvSpPr>
-        <p:spPr/>
-        <p:txBody>
-          <a:bodyPr/>
-          <a:lstStyle/>
-          <a:p>
-            <a:pPr lvl="0" indent="0" marL="0">
-              <a:buNone/>
-            </a:pPr>
-            <a:r>
-              <a:rPr/>
-              <a:t>Next Session</a:t>
-            </a:r>
-          </a:p>
-        </p:txBody>
-      </p:sp>
-      <p:sp>
-        <p:nvSpPr>
-          <p:cNvPr id="3" name="Content Placeholder 2"/>
-          <p:cNvSpPr>
-            <a:spLocks noGrp="1"/>
-          </p:cNvSpPr>
-          <p:nvPr>
-            <p:ph idx="1"/>
-          </p:nvPr>
-        </p:nvSpPr>
-        <p:spPr/>
-        <p:txBody>
-          <a:bodyPr/>
-          <a:lstStyle/>
-          <a:p>
-            <a:pPr lvl="0" indent="0" marL="0">
-              <a:buNone/>
-            </a:pPr>
-            <a:r>
-              <a:rPr b="1"/>
-              <a:t>Difference-in-Differences</a:t>
-            </a:r>
-            <a:r>
-              <a:rPr/>
-              <a:t>: Comparing changes over time between treatment and comparison groups</a:t>
-            </a:r>
-          </a:p>
-        </p:txBody>
-      </p:sp>
-    </p:spTree>
-  </p:cSld>
-</p:sld>
-</file>
-
 <file path=ppt/slides/slide2.xml><?xml version="1.0" encoding="utf-8"?>
 <p:sld xmlns:a="http://schemas.openxmlformats.org/drawingml/2006/main" xmlns:r="http://schemas.openxmlformats.org/officeDocument/2006/relationships" xmlns:p="http://schemas.openxmlformats.org/presentationml/2006/main">
   <p:cSld>
@@ -8254,22 +9604,22 @@
             <a:pPr lvl="0"/>
             <a:r>
               <a:rPr b="1"/>
-              <a:t>Assumption</a:t>
-            </a:r>
-            <a:r>
-              <a:rPr/>
-              <a:t>: Units close to threshold are similar except for treatment status</a:t>
-            </a:r>
-          </a:p>
-          <a:p>
-            <a:pPr lvl="0"/>
-            <a:r>
-              <a:rPr b="1"/>
               <a:t>Advantage</a:t>
             </a:r>
             <a:r>
               <a:rPr/>
               <a:t>: Credible causal inference from non-experimental data</a:t>
+            </a:r>
+          </a:p>
+          <a:p>
+            <a:pPr lvl="0"/>
+            <a:r>
+              <a:rPr b="1"/>
+              <a:t>Assumption</a:t>
+            </a:r>
+            <a:r>
+              <a:rPr/>
+              <a:t>: Units close to threshold are similar across all characteristics (observable and un-observable) except for treatment status and this threshold cannot be manipulated by others and is not being used by other projects provided to the same group</a:t>
             </a:r>
           </a:p>
           <a:p>
@@ -8595,6 +9945,82 @@
       <p:bldP spid="3" grpId="0" uiExpand="1" build="p"/>
     </p:bldLst>
   </p:timing>
+</p:sld>
+</file>
+
+<file path=ppt/slides/slide20.xml><?xml version="1.0" encoding="utf-8"?>
+<p:sld xmlns:a="http://schemas.openxmlformats.org/drawingml/2006/main" xmlns:r="http://schemas.openxmlformats.org/officeDocument/2006/relationships" xmlns:p="http://schemas.openxmlformats.org/presentationml/2006/main">
+  <p:cSld>
+    <p:spTree>
+      <p:nvGrpSpPr>
+        <p:cNvPr id="1" name=""/>
+        <p:cNvGrpSpPr/>
+        <p:nvPr/>
+      </p:nvGrpSpPr>
+      <p:grpSpPr>
+        <a:xfrm>
+          <a:off x="0" y="0"/>
+          <a:ext cx="0" cy="0"/>
+          <a:chOff x="0" y="0"/>
+          <a:chExt cx="0" cy="0"/>
+        </a:xfrm>
+      </p:grpSpPr>
+      <p:sp>
+        <p:nvSpPr>
+          <p:cNvPr id="2" name="Title 1"/>
+          <p:cNvSpPr>
+            <a:spLocks noGrp="1"/>
+          </p:cNvSpPr>
+          <p:nvPr>
+            <p:ph type="title"/>
+          </p:nvPr>
+        </p:nvSpPr>
+        <p:spPr/>
+        <p:txBody>
+          <a:bodyPr/>
+          <a:lstStyle/>
+          <a:p>
+            <a:pPr lvl="0" indent="0" marL="0">
+              <a:buNone/>
+            </a:pPr>
+            <a:r>
+              <a:rPr/>
+              <a:t>Next Session</a:t>
+            </a:r>
+          </a:p>
+        </p:txBody>
+      </p:sp>
+      <p:sp>
+        <p:nvSpPr>
+          <p:cNvPr id="3" name="Content Placeholder 2"/>
+          <p:cNvSpPr>
+            <a:spLocks noGrp="1"/>
+          </p:cNvSpPr>
+          <p:nvPr>
+            <p:ph idx="1"/>
+          </p:nvPr>
+        </p:nvSpPr>
+        <p:spPr/>
+        <p:txBody>
+          <a:bodyPr/>
+          <a:lstStyle/>
+          <a:p>
+            <a:pPr lvl="0" indent="0" marL="0">
+              <a:buNone/>
+            </a:pPr>
+            <a:r>
+              <a:rPr b="1"/>
+              <a:t>Difference-in-Differences</a:t>
+            </a:r>
+            <a:r>
+              <a:rPr/>
+              <a:t>: Comparing changes over time between treatment and comparison groups</a:t>
+            </a:r>
+          </a:p>
+        </p:txBody>
+      </p:sp>
+    </p:spTree>
+  </p:cSld>
 </p:sld>
 </file>
 
@@ -10623,7 +12049,7 @@
                 </a:solidFill>
                 <a:latin typeface="Courier"/>
               </a:rPr>
-              <a:t># Plot relationship between efficiency index and health expenditures</a:t>
+              <a:t># Plot relationship between efficiency index and waste expenditures</a:t>
             </a:r>
             <a:br/>
             <a:r>
@@ -12215,7 +13641,7 @@
                       </a:pPr>
                       <a:r>
                         <a:rPr/>
-                        <a:t>−9051.372***</a:t>
+                        <a:t>−905.137***</a:t>
                       </a:r>
                     </a:p>
                   </a:txBody>
@@ -12241,7 +13667,7 @@
                       </a:pPr>
                       <a:r>
                         <a:rPr/>
-                        <a:t>(443.750)</a:t>
+                        <a:t>(44.375)</a:t>
                       </a:r>
                     </a:p>
                   </a:txBody>
@@ -12427,7 +13853,7 @@
             <a:spLocks noGrp="1"/>
           </p:cNvSpPr>
           <p:nvPr>
-            <p:ph idx="1" sz="half"/>
+            <p:ph idx="1"/>
           </p:nvPr>
         </p:nvSpPr>
         <p:spPr/>
@@ -12435,1270 +13861,192 @@
           <a:bodyPr/>
           <a:lstStyle/>
           <a:p>
-            <a:pPr lvl="0" indent="0">
+            <a:pPr lvl="0" indent="0" marL="0">
               <a:buNone/>
             </a:pPr>
             <a:r>
-              <a:rPr>
-                <a:solidFill>
-                  <a:srgbClr val="003B4F"/>
-                </a:solidFill>
-                <a:latin typeface="Courier"/>
-              </a:rPr>
-              <a:t>out_rdd_quadratic  &lt;- </a:t>
-            </a:r>
-            <a:r>
-              <a:rPr>
-                <a:solidFill>
-                  <a:srgbClr val="4758AB"/>
-                </a:solidFill>
-                <a:latin typeface="Courier"/>
-              </a:rPr>
-              <a:t>lm_robust</a:t>
-            </a:r>
-            <a:r>
-              <a:rPr>
-                <a:solidFill>
-                  <a:srgbClr val="003B4F"/>
-                </a:solidFill>
-                <a:latin typeface="Courier"/>
-              </a:rPr>
-              <a:t>(waste_management_costs </a:t>
-            </a:r>
-            <a:r>
-              <a:rPr>
-                <a:solidFill>
-                  <a:srgbClr val="5E5E5E"/>
-                </a:solidFill>
-                <a:latin typeface="Courier"/>
-              </a:rPr>
-              <a:t>~</a:t>
-            </a:r>
-            <a:r>
-              <a:rPr>
-                <a:solidFill>
-                  <a:srgbClr val="003B4F"/>
-                </a:solidFill>
-                <a:latin typeface="Courier"/>
-              </a:rPr>
-              <a:t> </a:t>
-            </a:r>
-            <a:br/>
-            <a:r>
-              <a:rPr>
-                <a:solidFill>
-                  <a:srgbClr val="003B4F"/>
-                </a:solidFill>
-                <a:latin typeface="Courier"/>
-              </a:rPr>
-              <a:t>                  efficiency_index_c0 </a:t>
-            </a:r>
-            <a:r>
-              <a:rPr>
-                <a:solidFill>
-                  <a:srgbClr val="5E5E5E"/>
-                </a:solidFill>
-                <a:latin typeface="Courier"/>
-              </a:rPr>
-              <a:t>*</a:t>
-            </a:r>
-            <a:r>
-              <a:rPr>
-                <a:solidFill>
-                  <a:srgbClr val="003B4F"/>
-                </a:solidFill>
-                <a:latin typeface="Courier"/>
-              </a:rPr>
-              <a:t> enrolled </a:t>
-            </a:r>
-            <a:r>
-              <a:rPr>
-                <a:solidFill>
-                  <a:srgbClr val="5E5E5E"/>
-                </a:solidFill>
-                <a:latin typeface="Courier"/>
-              </a:rPr>
-              <a:t>+</a:t>
-            </a:r>
-            <a:br/>
-            <a:r>
-              <a:rPr>
-                <a:solidFill>
-                  <a:srgbClr val="003B4F"/>
-                </a:solidFill>
-                <a:latin typeface="Courier"/>
-              </a:rPr>
-              <a:t>                    enrolled </a:t>
-            </a:r>
-            <a:r>
-              <a:rPr>
-                <a:solidFill>
-                  <a:srgbClr val="5E5E5E"/>
-                </a:solidFill>
-                <a:latin typeface="Courier"/>
-              </a:rPr>
-              <a:t>*</a:t>
-            </a:r>
-            <a:r>
-              <a:rPr>
-                <a:solidFill>
-                  <a:srgbClr val="003B4F"/>
-                </a:solidFill>
-                <a:latin typeface="Courier"/>
-              </a:rPr>
-              <a:t> </a:t>
-            </a:r>
-            <a:r>
-              <a:rPr>
-                <a:solidFill>
-                  <a:srgbClr val="4758AB"/>
-                </a:solidFill>
-                <a:latin typeface="Courier"/>
-              </a:rPr>
-              <a:t>I</a:t>
-            </a:r>
-            <a:r>
-              <a:rPr>
-                <a:solidFill>
-                  <a:srgbClr val="003B4F"/>
-                </a:solidFill>
-                <a:latin typeface="Courier"/>
-              </a:rPr>
-              <a:t>(efficiency_index_c0</a:t>
-            </a:r>
-            <a:r>
-              <a:rPr>
-                <a:solidFill>
-                  <a:srgbClr val="5E5E5E"/>
-                </a:solidFill>
-                <a:latin typeface="Courier"/>
-              </a:rPr>
-              <a:t>^</a:t>
-            </a:r>
-            <a:r>
-              <a:rPr>
-                <a:solidFill>
-                  <a:srgbClr val="AD0000"/>
-                </a:solidFill>
-                <a:latin typeface="Courier"/>
-              </a:rPr>
-              <a:t>2</a:t>
-            </a:r>
-            <a:r>
-              <a:rPr>
-                <a:solidFill>
-                  <a:srgbClr val="003B4F"/>
-                </a:solidFill>
-                <a:latin typeface="Courier"/>
-              </a:rPr>
-              <a:t>) </a:t>
-            </a:r>
-            <a:r>
-              <a:rPr>
-                <a:solidFill>
-                  <a:srgbClr val="5E5E5E"/>
-                </a:solidFill>
-                <a:latin typeface="Courier"/>
-              </a:rPr>
-              <a:t>+</a:t>
-            </a:r>
-            <a:br/>
-            <a:r>
-              <a:rPr>
-                <a:solidFill>
-                  <a:srgbClr val="003B4F"/>
-                </a:solidFill>
-                <a:latin typeface="Courier"/>
-              </a:rPr>
-              <a:t>                  age_manager </a:t>
-            </a:r>
-            <a:r>
-              <a:rPr>
-                <a:solidFill>
-                  <a:srgbClr val="5E5E5E"/>
-                </a:solidFill>
-                <a:latin typeface="Courier"/>
-              </a:rPr>
-              <a:t>+</a:t>
-            </a:r>
-            <a:r>
-              <a:rPr>
-                <a:solidFill>
-                  <a:srgbClr val="003B4F"/>
-                </a:solidFill>
-                <a:latin typeface="Courier"/>
-              </a:rPr>
-              <a:t> age_deputy </a:t>
-            </a:r>
-            <a:r>
-              <a:rPr>
-                <a:solidFill>
-                  <a:srgbClr val="5E5E5E"/>
-                </a:solidFill>
-                <a:latin typeface="Courier"/>
-              </a:rPr>
-              <a:t>+</a:t>
-            </a:r>
-            <a:br/>
-            <a:r>
-              <a:rPr>
-                <a:solidFill>
-                  <a:srgbClr val="003B4F"/>
-                </a:solidFill>
-                <a:latin typeface="Courier"/>
-              </a:rPr>
-              <a:t>                  female_manager </a:t>
-            </a:r>
-            <a:r>
-              <a:rPr>
-                <a:solidFill>
-                  <a:srgbClr val="5E5E5E"/>
-                </a:solidFill>
-                <a:latin typeface="Courier"/>
-              </a:rPr>
-              <a:t>+</a:t>
-            </a:r>
-            <a:r>
-              <a:rPr>
-                <a:solidFill>
-                  <a:srgbClr val="003B4F"/>
-                </a:solidFill>
-                <a:latin typeface="Courier"/>
-              </a:rPr>
-              <a:t> foreign_owned </a:t>
-            </a:r>
-            <a:r>
-              <a:rPr>
-                <a:solidFill>
-                  <a:srgbClr val="5E5E5E"/>
-                </a:solidFill>
-                <a:latin typeface="Courier"/>
-              </a:rPr>
-              <a:t>+</a:t>
-            </a:r>
-            <a:r>
-              <a:rPr>
-                <a:solidFill>
-                  <a:srgbClr val="003B4F"/>
-                </a:solidFill>
-                <a:latin typeface="Courier"/>
-              </a:rPr>
-              <a:t> </a:t>
-            </a:r>
-            <a:br/>
-            <a:r>
-              <a:rPr>
-                <a:solidFill>
-                  <a:srgbClr val="003B4F"/>
-                </a:solidFill>
-                <a:latin typeface="Courier"/>
-              </a:rPr>
-              <a:t>                  staff_size </a:t>
-            </a:r>
-            <a:r>
-              <a:rPr>
-                <a:solidFill>
-                  <a:srgbClr val="5E5E5E"/>
-                </a:solidFill>
-                <a:latin typeface="Courier"/>
-              </a:rPr>
-              <a:t>+</a:t>
-            </a:r>
-            <a:br/>
-            <a:r>
-              <a:rPr>
-                <a:solidFill>
-                  <a:srgbClr val="003B4F"/>
-                </a:solidFill>
-                <a:latin typeface="Courier"/>
-              </a:rPr>
-              <a:t>                  advanced_filtration </a:t>
-            </a:r>
-            <a:r>
-              <a:rPr>
-                <a:solidFill>
-                  <a:srgbClr val="5E5E5E"/>
-                </a:solidFill>
-                <a:latin typeface="Courier"/>
-              </a:rPr>
-              <a:t>+</a:t>
-            </a:r>
-            <a:r>
-              <a:rPr>
-                <a:solidFill>
-                  <a:srgbClr val="003B4F"/>
-                </a:solidFill>
-                <a:latin typeface="Courier"/>
-              </a:rPr>
-              <a:t> facility_area </a:t>
-            </a:r>
-            <a:r>
-              <a:rPr>
-                <a:solidFill>
-                  <a:srgbClr val="5E5E5E"/>
-                </a:solidFill>
-                <a:latin typeface="Courier"/>
-              </a:rPr>
-              <a:t>+</a:t>
-            </a:r>
-            <a:br/>
-            <a:r>
-              <a:rPr>
-                <a:solidFill>
-                  <a:srgbClr val="003B4F"/>
-                </a:solidFill>
-                <a:latin typeface="Courier"/>
-              </a:rPr>
-              <a:t>                  recycling_center_distance,</a:t>
-            </a:r>
-            <a:br/>
-            <a:r>
-              <a:rPr>
-                <a:solidFill>
-                  <a:srgbClr val="003B4F"/>
-                </a:solidFill>
-                <a:latin typeface="Courier"/>
-              </a:rPr>
-              <a:t>                  </a:t>
-            </a:r>
-            <a:r>
-              <a:rPr>
-                <a:solidFill>
-                  <a:srgbClr val="657422"/>
-                </a:solidFill>
-                <a:latin typeface="Courier"/>
-              </a:rPr>
-              <a:t>data =</a:t>
-            </a:r>
-            <a:r>
-              <a:rPr>
-                <a:solidFill>
-                  <a:srgbClr val="003B4F"/>
-                </a:solidFill>
-                <a:latin typeface="Courier"/>
-              </a:rPr>
-              <a:t> df_treat </a:t>
-            </a:r>
-            <a:r>
-              <a:rPr>
-                <a:solidFill>
-                  <a:srgbClr val="5E5E5E"/>
-                </a:solidFill>
-                <a:latin typeface="Courier"/>
-              </a:rPr>
-              <a:t>%&gt;%</a:t>
-            </a:r>
-            <a:r>
-              <a:rPr>
-                <a:solidFill>
-                  <a:srgbClr val="003B4F"/>
-                </a:solidFill>
-                <a:latin typeface="Courier"/>
-              </a:rPr>
-              <a:t> </a:t>
-            </a:r>
-            <a:r>
-              <a:rPr>
-                <a:solidFill>
-                  <a:srgbClr val="4758AB"/>
-                </a:solidFill>
-                <a:latin typeface="Courier"/>
-              </a:rPr>
-              <a:t>filter</a:t>
-            </a:r>
-            <a:r>
-              <a:rPr>
-                <a:solidFill>
-                  <a:srgbClr val="003B4F"/>
-                </a:solidFill>
-                <a:latin typeface="Courier"/>
-              </a:rPr>
-              <a:t>(round </a:t>
-            </a:r>
-            <a:r>
-              <a:rPr>
-                <a:solidFill>
-                  <a:srgbClr val="5E5E5E"/>
-                </a:solidFill>
-                <a:latin typeface="Courier"/>
-              </a:rPr>
-              <a:t>==</a:t>
-            </a:r>
-            <a:r>
-              <a:rPr>
-                <a:solidFill>
-                  <a:srgbClr val="003B4F"/>
-                </a:solidFill>
-                <a:latin typeface="Courier"/>
-              </a:rPr>
-              <a:t> </a:t>
-            </a:r>
-            <a:r>
-              <a:rPr>
-                <a:solidFill>
-                  <a:srgbClr val="AD0000"/>
-                </a:solidFill>
-                <a:latin typeface="Courier"/>
-              </a:rPr>
-              <a:t>1</a:t>
-            </a:r>
-            <a:r>
-              <a:rPr>
-                <a:solidFill>
-                  <a:srgbClr val="003B4F"/>
-                </a:solidFill>
-                <a:latin typeface="Courier"/>
-              </a:rPr>
-              <a:t>))</a:t>
-            </a:r>
-            <a:br/>
-            <a:br/>
-            <a:r>
-              <a:rPr>
-                <a:solidFill>
-                  <a:srgbClr val="003B4F"/>
-                </a:solidFill>
-                <a:latin typeface="Courier"/>
-              </a:rPr>
-              <a:t>out_rdd_cubic  &lt;- </a:t>
-            </a:r>
-            <a:r>
-              <a:rPr>
-                <a:solidFill>
-                  <a:srgbClr val="4758AB"/>
-                </a:solidFill>
-                <a:latin typeface="Courier"/>
-              </a:rPr>
-              <a:t>lm_robust</a:t>
-            </a:r>
-            <a:r>
-              <a:rPr>
-                <a:solidFill>
-                  <a:srgbClr val="003B4F"/>
-                </a:solidFill>
-                <a:latin typeface="Courier"/>
-              </a:rPr>
-              <a:t>(waste_management_costs </a:t>
-            </a:r>
-            <a:r>
-              <a:rPr>
-                <a:solidFill>
-                  <a:srgbClr val="5E5E5E"/>
-                </a:solidFill>
-                <a:latin typeface="Courier"/>
-              </a:rPr>
-              <a:t>~</a:t>
-            </a:r>
-            <a:r>
-              <a:rPr>
-                <a:solidFill>
-                  <a:srgbClr val="003B4F"/>
-                </a:solidFill>
-                <a:latin typeface="Courier"/>
-              </a:rPr>
-              <a:t> </a:t>
-            </a:r>
-            <a:br/>
-            <a:r>
-              <a:rPr>
-                <a:solidFill>
-                  <a:srgbClr val="003B4F"/>
-                </a:solidFill>
-                <a:latin typeface="Courier"/>
-              </a:rPr>
-              <a:t>                  efficiency_index_c0 </a:t>
-            </a:r>
-            <a:r>
-              <a:rPr>
-                <a:solidFill>
-                  <a:srgbClr val="5E5E5E"/>
-                </a:solidFill>
-                <a:latin typeface="Courier"/>
-              </a:rPr>
-              <a:t>*</a:t>
-            </a:r>
-            <a:r>
-              <a:rPr>
-                <a:solidFill>
-                  <a:srgbClr val="003B4F"/>
-                </a:solidFill>
-                <a:latin typeface="Courier"/>
-              </a:rPr>
-              <a:t> enrolled </a:t>
-            </a:r>
-            <a:r>
-              <a:rPr>
-                <a:solidFill>
-                  <a:srgbClr val="5E5E5E"/>
-                </a:solidFill>
-                <a:latin typeface="Courier"/>
-              </a:rPr>
-              <a:t>+</a:t>
-            </a:r>
-            <a:br/>
-            <a:r>
-              <a:rPr>
-                <a:solidFill>
-                  <a:srgbClr val="003B4F"/>
-                </a:solidFill>
-                <a:latin typeface="Courier"/>
-              </a:rPr>
-              <a:t>                    enrolled </a:t>
-            </a:r>
-            <a:r>
-              <a:rPr>
-                <a:solidFill>
-                  <a:srgbClr val="5E5E5E"/>
-                </a:solidFill>
-                <a:latin typeface="Courier"/>
-              </a:rPr>
-              <a:t>*</a:t>
-            </a:r>
-            <a:r>
-              <a:rPr>
-                <a:solidFill>
-                  <a:srgbClr val="003B4F"/>
-                </a:solidFill>
-                <a:latin typeface="Courier"/>
-              </a:rPr>
-              <a:t> </a:t>
-            </a:r>
-            <a:r>
-              <a:rPr>
-                <a:solidFill>
-                  <a:srgbClr val="4758AB"/>
-                </a:solidFill>
-                <a:latin typeface="Courier"/>
-              </a:rPr>
-              <a:t>I</a:t>
-            </a:r>
-            <a:r>
-              <a:rPr>
-                <a:solidFill>
-                  <a:srgbClr val="003B4F"/>
-                </a:solidFill>
-                <a:latin typeface="Courier"/>
-              </a:rPr>
-              <a:t>(efficiency_index_c0</a:t>
-            </a:r>
-            <a:r>
-              <a:rPr>
-                <a:solidFill>
-                  <a:srgbClr val="5E5E5E"/>
-                </a:solidFill>
-                <a:latin typeface="Courier"/>
-              </a:rPr>
-              <a:t>^</a:t>
-            </a:r>
-            <a:r>
-              <a:rPr>
-                <a:solidFill>
-                  <a:srgbClr val="AD0000"/>
-                </a:solidFill>
-                <a:latin typeface="Courier"/>
-              </a:rPr>
-              <a:t>2</a:t>
-            </a:r>
-            <a:r>
-              <a:rPr>
-                <a:solidFill>
-                  <a:srgbClr val="003B4F"/>
-                </a:solidFill>
-                <a:latin typeface="Courier"/>
-              </a:rPr>
-              <a:t>) </a:t>
-            </a:r>
-            <a:r>
-              <a:rPr>
-                <a:solidFill>
-                  <a:srgbClr val="5E5E5E"/>
-                </a:solidFill>
-                <a:latin typeface="Courier"/>
-              </a:rPr>
-              <a:t>+</a:t>
-            </a:r>
-            <a:r>
-              <a:rPr>
-                <a:solidFill>
-                  <a:srgbClr val="003B4F"/>
-                </a:solidFill>
-                <a:latin typeface="Courier"/>
-              </a:rPr>
-              <a:t> </a:t>
-            </a:r>
-            <a:br/>
-            <a:r>
-              <a:rPr>
-                <a:solidFill>
-                  <a:srgbClr val="003B4F"/>
-                </a:solidFill>
-                <a:latin typeface="Courier"/>
-              </a:rPr>
-              <a:t>                        enrolled </a:t>
-            </a:r>
-            <a:r>
-              <a:rPr>
-                <a:solidFill>
-                  <a:srgbClr val="5E5E5E"/>
-                </a:solidFill>
-                <a:latin typeface="Courier"/>
-              </a:rPr>
-              <a:t>*</a:t>
-            </a:r>
-            <a:r>
-              <a:rPr>
-                <a:solidFill>
-                  <a:srgbClr val="003B4F"/>
-                </a:solidFill>
-                <a:latin typeface="Courier"/>
-              </a:rPr>
-              <a:t> </a:t>
-            </a:r>
-            <a:r>
-              <a:rPr>
-                <a:solidFill>
-                  <a:srgbClr val="4758AB"/>
-                </a:solidFill>
-                <a:latin typeface="Courier"/>
-              </a:rPr>
-              <a:t>I</a:t>
-            </a:r>
-            <a:r>
-              <a:rPr>
-                <a:solidFill>
-                  <a:srgbClr val="003B4F"/>
-                </a:solidFill>
-                <a:latin typeface="Courier"/>
-              </a:rPr>
-              <a:t>(efficiency_index_c0</a:t>
-            </a:r>
-            <a:r>
-              <a:rPr>
-                <a:solidFill>
-                  <a:srgbClr val="5E5E5E"/>
-                </a:solidFill>
-                <a:latin typeface="Courier"/>
-              </a:rPr>
-              <a:t>^</a:t>
-            </a:r>
-            <a:r>
-              <a:rPr>
-                <a:solidFill>
-                  <a:srgbClr val="AD0000"/>
-                </a:solidFill>
-                <a:latin typeface="Courier"/>
-              </a:rPr>
-              <a:t>3</a:t>
-            </a:r>
-            <a:r>
-              <a:rPr>
-                <a:solidFill>
-                  <a:srgbClr val="003B4F"/>
-                </a:solidFill>
-                <a:latin typeface="Courier"/>
-              </a:rPr>
-              <a:t>) </a:t>
-            </a:r>
-            <a:r>
-              <a:rPr>
-                <a:solidFill>
-                  <a:srgbClr val="5E5E5E"/>
-                </a:solidFill>
-                <a:latin typeface="Courier"/>
-              </a:rPr>
-              <a:t>+</a:t>
-            </a:r>
-            <a:br/>
-            <a:r>
-              <a:rPr>
-                <a:solidFill>
-                  <a:srgbClr val="003B4F"/>
-                </a:solidFill>
-                <a:latin typeface="Courier"/>
-              </a:rPr>
-              <a:t>                  age_manager </a:t>
-            </a:r>
-            <a:r>
-              <a:rPr>
-                <a:solidFill>
-                  <a:srgbClr val="5E5E5E"/>
-                </a:solidFill>
-                <a:latin typeface="Courier"/>
-              </a:rPr>
-              <a:t>+</a:t>
-            </a:r>
-            <a:r>
-              <a:rPr>
-                <a:solidFill>
-                  <a:srgbClr val="003B4F"/>
-                </a:solidFill>
-                <a:latin typeface="Courier"/>
-              </a:rPr>
-              <a:t> age_deputy </a:t>
-            </a:r>
-            <a:r>
-              <a:rPr>
-                <a:solidFill>
-                  <a:srgbClr val="5E5E5E"/>
-                </a:solidFill>
-                <a:latin typeface="Courier"/>
-              </a:rPr>
-              <a:t>+</a:t>
-            </a:r>
-            <a:br/>
-            <a:r>
-              <a:rPr>
-                <a:solidFill>
-                  <a:srgbClr val="003B4F"/>
-                </a:solidFill>
-                <a:latin typeface="Courier"/>
-              </a:rPr>
-              <a:t>                  female_manager </a:t>
-            </a:r>
-            <a:r>
-              <a:rPr>
-                <a:solidFill>
-                  <a:srgbClr val="5E5E5E"/>
-                </a:solidFill>
-                <a:latin typeface="Courier"/>
-              </a:rPr>
-              <a:t>+</a:t>
-            </a:r>
-            <a:r>
-              <a:rPr>
-                <a:solidFill>
-                  <a:srgbClr val="003B4F"/>
-                </a:solidFill>
-                <a:latin typeface="Courier"/>
-              </a:rPr>
-              <a:t> foreign_owned </a:t>
-            </a:r>
-            <a:r>
-              <a:rPr>
-                <a:solidFill>
-                  <a:srgbClr val="5E5E5E"/>
-                </a:solidFill>
-                <a:latin typeface="Courier"/>
-              </a:rPr>
-              <a:t>+</a:t>
-            </a:r>
-            <a:r>
-              <a:rPr>
-                <a:solidFill>
-                  <a:srgbClr val="003B4F"/>
-                </a:solidFill>
-                <a:latin typeface="Courier"/>
-              </a:rPr>
-              <a:t> </a:t>
-            </a:r>
-            <a:br/>
-            <a:r>
-              <a:rPr>
-                <a:solidFill>
-                  <a:srgbClr val="003B4F"/>
-                </a:solidFill>
-                <a:latin typeface="Courier"/>
-              </a:rPr>
-              <a:t>                  staff_size </a:t>
-            </a:r>
-            <a:r>
-              <a:rPr>
-                <a:solidFill>
-                  <a:srgbClr val="5E5E5E"/>
-                </a:solidFill>
-                <a:latin typeface="Courier"/>
-              </a:rPr>
-              <a:t>+</a:t>
-            </a:r>
-            <a:br/>
-            <a:r>
-              <a:rPr>
-                <a:solidFill>
-                  <a:srgbClr val="003B4F"/>
-                </a:solidFill>
-                <a:latin typeface="Courier"/>
-              </a:rPr>
-              <a:t>                  advanced_filtration </a:t>
-            </a:r>
-            <a:r>
-              <a:rPr>
-                <a:solidFill>
-                  <a:srgbClr val="5E5E5E"/>
-                </a:solidFill>
-                <a:latin typeface="Courier"/>
-              </a:rPr>
-              <a:t>+</a:t>
-            </a:r>
-            <a:r>
-              <a:rPr>
-                <a:solidFill>
-                  <a:srgbClr val="003B4F"/>
-                </a:solidFill>
-                <a:latin typeface="Courier"/>
-              </a:rPr>
-              <a:t> facility_area </a:t>
-            </a:r>
-            <a:r>
-              <a:rPr>
-                <a:solidFill>
-                  <a:srgbClr val="5E5E5E"/>
-                </a:solidFill>
-                <a:latin typeface="Courier"/>
-              </a:rPr>
-              <a:t>+</a:t>
-            </a:r>
-            <a:br/>
-            <a:r>
-              <a:rPr>
-                <a:solidFill>
-                  <a:srgbClr val="003B4F"/>
-                </a:solidFill>
-                <a:latin typeface="Courier"/>
-              </a:rPr>
-              <a:t>                  recycling_center_distance,</a:t>
-            </a:r>
-            <a:br/>
-            <a:r>
-              <a:rPr>
-                <a:solidFill>
-                  <a:srgbClr val="003B4F"/>
-                </a:solidFill>
-                <a:latin typeface="Courier"/>
-              </a:rPr>
-              <a:t>                  </a:t>
-            </a:r>
-            <a:r>
-              <a:rPr>
-                <a:solidFill>
-                  <a:srgbClr val="657422"/>
-                </a:solidFill>
-                <a:latin typeface="Courier"/>
-              </a:rPr>
-              <a:t>data =</a:t>
-            </a:r>
-            <a:r>
-              <a:rPr>
-                <a:solidFill>
-                  <a:srgbClr val="003B4F"/>
-                </a:solidFill>
-                <a:latin typeface="Courier"/>
-              </a:rPr>
-              <a:t> df_treat </a:t>
-            </a:r>
-            <a:r>
-              <a:rPr>
-                <a:solidFill>
-                  <a:srgbClr val="5E5E5E"/>
-                </a:solidFill>
-                <a:latin typeface="Courier"/>
-              </a:rPr>
-              <a:t>%&gt;%</a:t>
-            </a:r>
-            <a:r>
-              <a:rPr>
-                <a:solidFill>
-                  <a:srgbClr val="003B4F"/>
-                </a:solidFill>
-                <a:latin typeface="Courier"/>
-              </a:rPr>
-              <a:t> </a:t>
-            </a:r>
-            <a:r>
-              <a:rPr>
-                <a:solidFill>
-                  <a:srgbClr val="4758AB"/>
-                </a:solidFill>
-                <a:latin typeface="Courier"/>
-              </a:rPr>
-              <a:t>filter</a:t>
-            </a:r>
-            <a:r>
-              <a:rPr>
-                <a:solidFill>
-                  <a:srgbClr val="003B4F"/>
-                </a:solidFill>
-                <a:latin typeface="Courier"/>
-              </a:rPr>
-              <a:t>(round </a:t>
-            </a:r>
-            <a:r>
-              <a:rPr>
-                <a:solidFill>
-                  <a:srgbClr val="5E5E5E"/>
-                </a:solidFill>
-                <a:latin typeface="Courier"/>
-              </a:rPr>
-              <a:t>==</a:t>
-            </a:r>
-            <a:r>
-              <a:rPr>
-                <a:solidFill>
-                  <a:srgbClr val="003B4F"/>
-                </a:solidFill>
-                <a:latin typeface="Courier"/>
-              </a:rPr>
-              <a:t> </a:t>
-            </a:r>
-            <a:r>
-              <a:rPr>
-                <a:solidFill>
-                  <a:srgbClr val="AD0000"/>
-                </a:solidFill>
-                <a:latin typeface="Courier"/>
-              </a:rPr>
-              <a:t>1</a:t>
-            </a:r>
-            <a:r>
-              <a:rPr>
-                <a:solidFill>
-                  <a:srgbClr val="003B4F"/>
-                </a:solidFill>
-                <a:latin typeface="Courier"/>
-              </a:rPr>
-              <a:t>))</a:t>
+              <a:rPr/>
+              <a:t>In Regression Discontinuity Designs (RDD), the relationship between the running variable and the outcome might not be perfectly linear. To make sure the results are robust, we estimate:</a:t>
+            </a:r>
+          </a:p>
+          <a:p>
+            <a:pPr lvl="0" indent="-342900" marL="342900">
+              <a:buAutoNum type="arabicPeriod"/>
+            </a:pPr>
+            <a:r>
+              <a:rPr/>
+              <a:t>A </a:t>
+            </a:r>
+            <a:r>
+              <a:rPr b="1"/>
+              <a:t>quadratic model</a:t>
+            </a:r>
+            <a:r>
+              <a:rPr/>
+              <a:t> (2nd degree polynomial) — allowing for a curved relationship.</a:t>
+            </a:r>
+          </a:p>
+          <a:p>
+            <a:pPr lvl="0" indent="-342900" marL="342900">
+              <a:buAutoNum type="arabicPeriod"/>
+            </a:pPr>
+            <a:r>
+              <a:rPr/>
+              <a:t>A </a:t>
+            </a:r>
+            <a:r>
+              <a:rPr b="1"/>
+              <a:t>cubic model</a:t>
+            </a:r>
+            <a:r>
+              <a:rPr/>
+              <a:t> (3rd degree polynomial) — allowing for even more flexibility in curvature.</a:t>
+            </a:r>
+          </a:p>
+          <a:p>
+            <a:pPr lvl="0" indent="0" marL="0">
+              <a:buNone/>
+            </a:pPr>
+            <a:r>
+              <a:rPr/>
+              <a:t>This helps test whether the RDD results are sensitive to how we model the relationship near the cutoff.</a:t>
             </a:r>
           </a:p>
         </p:txBody>
       </p:sp>
-      <p:graphicFrame>
-        <p:nvGraphicFramePr>
-          <p:cNvPr id="6" name="Content Placeholder 5"/>
-          <p:cNvGraphicFramePr>
-            <a:graphicFrameLocks noGrp="1"/>
-          </p:cNvGraphicFramePr>
-          <p:nvPr>
-            <p:ph idx="1"/>
-          </p:nvPr>
-        </p:nvGraphicFramePr>
-        <p:xfrm>
-          <a:off x="4648200" y="1193800"/>
-          <a:ext cx="4038600" cy="3390900"/>
-        </p:xfrm>
-        <a:graphic>
-          <a:graphicData uri="http://schemas.openxmlformats.org/drawingml/2006/table">
-            <a:tbl>
-              <a:tblPr firstRow="1" bandRow="1">
-                <a:tableStyleId>{5C22544A-7EE6-4342-B048-85BDC9FD1C3A}</a:tableStyleId>
-              </a:tblPr>
-              <a:tblGrid>
-                <a:gridCol w="1346200"/>
-                <a:gridCol w="1346200"/>
-                <a:gridCol w="1346200"/>
-              </a:tblGrid>
-              <a:tr h="0">
-                <a:tc>
-                  <a:txBody>
-                    <a:bodyPr/>
-                    <a:lstStyle/>
-                    <a:p>
-                      <a:endParaRPr/>
-                    </a:p>
-                  </a:txBody>
-                  <a:tcPr/>
-                </a:tc>
-                <a:tc>
-                  <a:txBody>
-                    <a:bodyPr/>
-                    <a:lstStyle/>
-                    <a:p>
-                      <a:pPr lvl="0" indent="0" marL="0" algn="ctr">
-                        <a:buNone/>
-                      </a:pPr>
-                      <a:r>
-                        <a:rPr/>
-                        <a:t>Quadratic RDD</a:t>
-                      </a:r>
-                    </a:p>
-                  </a:txBody>
-                  <a:tcPr/>
-                </a:tc>
-                <a:tc>
-                  <a:txBody>
-                    <a:bodyPr/>
-                    <a:lstStyle/>
-                    <a:p>
-                      <a:pPr lvl="0" indent="0" marL="0" algn="ctr">
-                        <a:buNone/>
-                      </a:pPr>
-                      <a:r>
-                        <a:rPr/>
-                        <a:t>Cubic RDD</a:t>
-                      </a:r>
-                    </a:p>
-                  </a:txBody>
-                  <a:tcPr/>
-                </a:tc>
-              </a:tr>
-              <a:tr h="0">
-                <a:tc>
-                  <a:txBody>
-                    <a:bodyPr/>
-                    <a:lstStyle/>
-                    <a:p>
-                      <a:pPr lvl="0" indent="0" marL="0" algn="l">
-                        <a:buNone/>
-                      </a:pPr>
-                      <a:r>
-                        <a:rPr/>
-                        <a:t>enrolled</a:t>
-                      </a:r>
-                    </a:p>
-                  </a:txBody>
-                </a:tc>
-                <a:tc>
-                  <a:txBody>
-                    <a:bodyPr/>
-                    <a:lstStyle/>
-                    <a:p>
-                      <a:pPr lvl="0" indent="0" marL="0" algn="ctr">
-                        <a:buNone/>
-                      </a:pPr>
-                      <a:r>
-                        <a:rPr/>
-                        <a:t>−9457.680***</a:t>
-                      </a:r>
-                    </a:p>
-                  </a:txBody>
-                </a:tc>
-                <a:tc>
-                  <a:txBody>
-                    <a:bodyPr/>
-                    <a:lstStyle/>
-                    <a:p>
-                      <a:pPr lvl="0" indent="0" marL="0" algn="ctr">
-                        <a:buNone/>
-                      </a:pPr>
-                      <a:r>
-                        <a:rPr/>
-                        <a:t>−8934.280***</a:t>
-                      </a:r>
-                    </a:p>
-                  </a:txBody>
-                </a:tc>
-              </a:tr>
-              <a:tr h="0">
-                <a:tc>
-                  <a:txBody>
-                    <a:bodyPr/>
-                    <a:lstStyle/>
-                    <a:p>
-                      <a:endParaRPr/>
-                    </a:p>
-                  </a:txBody>
-                </a:tc>
-                <a:tc>
-                  <a:txBody>
-                    <a:bodyPr/>
-                    <a:lstStyle/>
-                    <a:p>
-                      <a:pPr lvl="0" indent="0" marL="0" algn="ctr">
-                        <a:buNone/>
-                      </a:pPr>
-                      <a:r>
-                        <a:rPr/>
-                        <a:t>(609.896)</a:t>
-                      </a:r>
-                    </a:p>
-                  </a:txBody>
-                </a:tc>
-                <a:tc>
-                  <a:txBody>
-                    <a:bodyPr/>
-                    <a:lstStyle/>
-                    <a:p>
-                      <a:pPr lvl="0" indent="0" marL="0" algn="ctr">
-                        <a:buNone/>
-                      </a:pPr>
-                      <a:r>
-                        <a:rPr/>
-                        <a:t>(757.032)</a:t>
-                      </a:r>
-                    </a:p>
-                  </a:txBody>
-                </a:tc>
-              </a:tr>
-              <a:tr h="0">
-                <a:tc>
-                  <a:txBody>
-                    <a:bodyPr/>
-                    <a:lstStyle/>
-                    <a:p>
-                      <a:pPr lvl="0" indent="0" marL="0" algn="l">
-                        <a:buNone/>
-                      </a:pPr>
-                      <a:r>
-                        <a:rPr/>
-                        <a:t>Num.Obs.</a:t>
-                      </a:r>
-                    </a:p>
-                  </a:txBody>
-                </a:tc>
-                <a:tc>
-                  <a:txBody>
-                    <a:bodyPr/>
-                    <a:lstStyle/>
-                    <a:p>
-                      <a:pPr lvl="0" indent="0" marL="0" algn="ctr">
-                        <a:buNone/>
-                      </a:pPr>
-                      <a:r>
-                        <a:rPr/>
-                        <a:t>4960</a:t>
-                      </a:r>
-                    </a:p>
-                  </a:txBody>
-                </a:tc>
-                <a:tc>
-                  <a:txBody>
-                    <a:bodyPr/>
-                    <a:lstStyle/>
-                    <a:p>
-                      <a:pPr lvl="0" indent="0" marL="0" algn="ctr">
-                        <a:buNone/>
-                      </a:pPr>
-                      <a:r>
-                        <a:rPr/>
-                        <a:t>4960</a:t>
-                      </a:r>
-                    </a:p>
-                  </a:txBody>
-                </a:tc>
-              </a:tr>
-              <a:tr h="0">
-                <a:tc>
-                  <a:txBody>
-                    <a:bodyPr/>
-                    <a:lstStyle/>
-                    <a:p>
-                      <a:pPr lvl="0" indent="0" marL="0" algn="l">
-                        <a:buNone/>
-                      </a:pPr>
-                      <a:r>
-                        <a:rPr/>
-                        <a:t>R2</a:t>
-                      </a:r>
-                    </a:p>
-                  </a:txBody>
-                </a:tc>
-                <a:tc>
-                  <a:txBody>
-                    <a:bodyPr/>
-                    <a:lstStyle/>
-                    <a:p>
-                      <a:pPr lvl="0" indent="0" marL="0" algn="ctr">
-                        <a:buNone/>
-                      </a:pPr>
-                      <a:r>
-                        <a:rPr/>
-                        <a:t>0.457</a:t>
-                      </a:r>
-                    </a:p>
-                  </a:txBody>
-                </a:tc>
-                <a:tc>
-                  <a:txBody>
-                    <a:bodyPr/>
-                    <a:lstStyle/>
-                    <a:p>
-                      <a:pPr lvl="0" indent="0" marL="0" algn="ctr">
-                        <a:buNone/>
-                      </a:pPr>
-                      <a:r>
-                        <a:rPr/>
-                        <a:t>0.457</a:t>
-                      </a:r>
-                    </a:p>
-                  </a:txBody>
-                </a:tc>
-              </a:tr>
-              <a:tr h="0">
-                <a:tc>
-                  <a:txBody>
-                    <a:bodyPr/>
-                    <a:lstStyle/>
-                    <a:p>
-                      <a:pPr lvl="0" indent="0" marL="0" algn="l">
-                        <a:buNone/>
-                      </a:pPr>
-                      <a:r>
-                        <a:rPr/>
-                        <a:t>R2 Adj.</a:t>
-                      </a:r>
-                    </a:p>
-                  </a:txBody>
-                </a:tc>
-                <a:tc>
-                  <a:txBody>
-                    <a:bodyPr/>
-                    <a:lstStyle/>
-                    <a:p>
-                      <a:pPr lvl="0" indent="0" marL="0" algn="ctr">
-                        <a:buNone/>
-                      </a:pPr>
-                      <a:r>
-                        <a:rPr/>
-                        <a:t>0.456</a:t>
-                      </a:r>
-                    </a:p>
-                  </a:txBody>
-                </a:tc>
-                <a:tc>
-                  <a:txBody>
-                    <a:bodyPr/>
-                    <a:lstStyle/>
-                    <a:p>
-                      <a:pPr lvl="0" indent="0" marL="0" algn="ctr">
-                        <a:buNone/>
-                      </a:pPr>
-                      <a:r>
-                        <a:rPr/>
-                        <a:t>0.456</a:t>
-                      </a:r>
-                    </a:p>
-                  </a:txBody>
-                </a:tc>
-              </a:tr>
-              <a:tr h="0">
-                <a:tc>
-                  <a:txBody>
-                    <a:bodyPr/>
-                    <a:lstStyle/>
-                    <a:p>
-                      <a:pPr lvl="0" indent="0" marL="0" algn="l">
-                        <a:buNone/>
-                      </a:pPr>
-                      <a:r>
-                        <a:rPr/>
-                        <a:t> + p &lt; 0.1, * p &lt; 0.05, ** p &lt; 0.01, *** p &lt; 0.001</a:t>
-                      </a:r>
-                    </a:p>
-                  </a:txBody>
-                </a:tc>
-                <a:tc>
-                  <a:txBody>
-                    <a:bodyPr/>
-                    <a:lstStyle/>
-                    <a:p>
-                      <a:endParaRPr/>
-                    </a:p>
-                  </a:txBody>
-                </a:tc>
-                <a:tc>
-                  <a:txBody>
-                    <a:bodyPr/>
-                    <a:lstStyle/>
-                    <a:p>
-                      <a:endParaRPr/>
-                    </a:p>
-                  </a:txBody>
-                </a:tc>
-              </a:tr>
-            </a:tbl>
-          </a:graphicData>
-        </a:graphic>
-      </p:graphicFrame>
     </p:spTree>
   </p:cSld>
+  <p:timing>
+    <p:tnLst>
+      <p:par>
+        <p:cTn id="1" dur="indefinite" restart="never" nodeType="tmRoot">
+          <p:childTnLst>
+            <p:seq concurrent="1" nextAc="seek">
+              <p:cTn id="2" dur="indefinite" nodeType="mainSeq">
+                <p:childTnLst>
+                  <p:par>
+                    <p:cTn id="3" fill="hold">
+                      <p:stCondLst>
+                        <p:cond delay="indefinite"/>
+                      </p:stCondLst>
+                      <p:childTnLst>
+                        <p:par>
+                          <p:cTn id="4" fill="hold">
+                            <p:stCondLst>
+                              <p:cond delay="0"/>
+                            </p:stCondLst>
+                            <p:childTnLst>
+                              <p:par>
+                                <p:cTn id="5" presetID="1" presetClass="entr" presetSubtype="0" fill="hold" grpId="0" nodeType="clickEffect">
+                                  <p:stCondLst>
+                                    <p:cond delay="0"/>
+                                  </p:stCondLst>
+                                  <p:childTnLst>
+                                    <p:set>
+                                      <p:cBhvr>
+                                        <p:cTn id="6" dur="1" fill="hold">
+                                          <p:stCondLst>
+                                            <p:cond delay="0"/>
+                                          </p:stCondLst>
+                                        </p:cTn>
+                                        <p:tgtEl>
+                                          <p:spTgt spid="3">
+                                            <p:txEl>
+                                              <p:pRg st="1" end="1"/>
+                                            </p:txEl>
+                                          </p:spTgt>
+                                        </p:tgtEl>
+                                        <p:attrNameLst>
+                                          <p:attrName>style.visibility</p:attrName>
+                                        </p:attrNameLst>
+                                      </p:cBhvr>
+                                      <p:to>
+                                        <p:strVal val="visible"/>
+                                      </p:to>
+                                    </p:set>
+                                  </p:childTnLst>
+                                </p:cTn>
+                              </p:par>
+                            </p:childTnLst>
+                          </p:cTn>
+                        </p:par>
+                      </p:childTnLst>
+                    </p:cTn>
+                  </p:par>
+                  <p:par>
+                    <p:cTn id="7" fill="hold">
+                      <p:stCondLst>
+                        <p:cond delay="indefinite"/>
+                      </p:stCondLst>
+                      <p:childTnLst>
+                        <p:par>
+                          <p:cTn id="8" fill="hold">
+                            <p:stCondLst>
+                              <p:cond delay="0"/>
+                            </p:stCondLst>
+                            <p:childTnLst>
+                              <p:par>
+                                <p:cTn id="9" presetID="1" presetClass="entr" presetSubtype="0" fill="hold" grpId="0" nodeType="clickEffect">
+                                  <p:stCondLst>
+                                    <p:cond delay="0"/>
+                                  </p:stCondLst>
+                                  <p:childTnLst>
+                                    <p:set>
+                                      <p:cBhvr>
+                                        <p:cTn id="10" dur="1" fill="hold">
+                                          <p:stCondLst>
+                                            <p:cond delay="0"/>
+                                          </p:stCondLst>
+                                        </p:cTn>
+                                        <p:tgtEl>
+                                          <p:spTgt spid="3">
+                                            <p:txEl>
+                                              <p:pRg st="2" end="2"/>
+                                            </p:txEl>
+                                          </p:spTgt>
+                                        </p:tgtEl>
+                                        <p:attrNameLst>
+                                          <p:attrName>style.visibility</p:attrName>
+                                        </p:attrNameLst>
+                                      </p:cBhvr>
+                                      <p:to>
+                                        <p:strVal val="visible"/>
+                                      </p:to>
+                                    </p:set>
+                                  </p:childTnLst>
+                                </p:cTn>
+                              </p:par>
+                            </p:childTnLst>
+                          </p:cTn>
+                        </p:par>
+                      </p:childTnLst>
+                    </p:cTn>
+                  </p:par>
+                </p:childTnLst>
+              </p:cTn>
+              <p:prevCondLst>
+                <p:cond evt="onPrev" delay="0">
+                  <p:tgtEl>
+                    <p:sldTgt/>
+                  </p:tgtEl>
+                </p:cond>
+              </p:prevCondLst>
+              <p:nextCondLst>
+                <p:cond evt="onNext" delay="0">
+                  <p:tgtEl>
+                    <p:sldTgt/>
+                  </p:tgtEl>
+                </p:cond>
+              </p:nextCondLst>
+            </p:seq>
+          </p:childTnLst>
+        </p:cTn>
+      </p:par>
+    </p:tnLst>
+    <p:bldLst>
+      <p:bldP spid="3" grpId="0" uiExpand="1" build="p"/>
+    </p:bldLst>
+  </p:timing>
 </p:sld>
 </file>
 
